--- a/public/videos/repositories/dqwalk-mukatoshin/dqwalk-mukatoshin-tech-preview.pptx
+++ b/public/videos/repositories/dqwalk-mukatoshin/dqwalk-mukatoshin-tech-preview.pptx
@@ -134,7 +134,7 @@
           <p:cNvPr id="2" name="タイトル 1">
             <a:extLst>
               <a:ext uri="{FF2B5EF4-FFF2-40B4-BE49-F238E27FC236}">
-                <a16:creationId xmlns:a16="http://schemas.microsoft.com/office/drawing/2014/main" id="{8ADE7FA8-238B-2FF7-5C88-01124A06B91B}"/>
+                <a16:creationId xmlns:a16="http://schemas.microsoft.com/office/drawing/2014/main" id="{CA016839-3988-4AF3-B8A6-0CCBD405DC60}"/>
               </a:ext>
             </a:extLst>
           </p:cNvPr>
@@ -171,7 +171,7 @@
           <p:cNvPr id="3" name="字幕 2">
             <a:extLst>
               <a:ext uri="{FF2B5EF4-FFF2-40B4-BE49-F238E27FC236}">
-                <a16:creationId xmlns:a16="http://schemas.microsoft.com/office/drawing/2014/main" id="{0EE3189D-C2DF-1EAC-33E8-0C0F6D4AE32E}"/>
+                <a16:creationId xmlns:a16="http://schemas.microsoft.com/office/drawing/2014/main" id="{12E7225D-AF84-2582-10B6-7CEE67F6EFDA}"/>
               </a:ext>
             </a:extLst>
           </p:cNvPr>
@@ -241,7 +241,7 @@
           <p:cNvPr id="4" name="日付プレースホルダー 3">
             <a:extLst>
               <a:ext uri="{FF2B5EF4-FFF2-40B4-BE49-F238E27FC236}">
-                <a16:creationId xmlns:a16="http://schemas.microsoft.com/office/drawing/2014/main" id="{30AC2726-78F4-52C0-83D4-B1EEC462E963}"/>
+                <a16:creationId xmlns:a16="http://schemas.microsoft.com/office/drawing/2014/main" id="{98BB1475-B6C6-1CB8-E6B3-2F955B05DCB6}"/>
               </a:ext>
             </a:extLst>
           </p:cNvPr>
@@ -257,7 +257,7 @@
           <a:bodyPr/>
           <a:lstStyle/>
           <a:p>
-            <a:fld id="{E020A80F-0EF2-464F-B51E-5ED015D5F829}" type="datetimeFigureOut">
+            <a:fld id="{5A73DC13-68B4-4392-81B5-A9F927C5A546}" type="datetimeFigureOut">
               <a:rPr kumimoji="1" lang="ja-JP" altLang="en-US" smtClean="0"/>
               <a:t>2026/7/30</a:t>
             </a:fld>
@@ -270,7 +270,7 @@
           <p:cNvPr id="5" name="フッター プレースホルダー 4">
             <a:extLst>
               <a:ext uri="{FF2B5EF4-FFF2-40B4-BE49-F238E27FC236}">
-                <a16:creationId xmlns:a16="http://schemas.microsoft.com/office/drawing/2014/main" id="{43541B51-FFE6-2264-4ECD-DB3A47BB8540}"/>
+                <a16:creationId xmlns:a16="http://schemas.microsoft.com/office/drawing/2014/main" id="{8BFDB56D-BF93-CB90-01B5-C0FED12FF7B0}"/>
               </a:ext>
             </a:extLst>
           </p:cNvPr>
@@ -295,7 +295,7 @@
           <p:cNvPr id="6" name="スライド番号プレースホルダー 5">
             <a:extLst>
               <a:ext uri="{FF2B5EF4-FFF2-40B4-BE49-F238E27FC236}">
-                <a16:creationId xmlns:a16="http://schemas.microsoft.com/office/drawing/2014/main" id="{C7F26108-B480-84AC-8F8C-5684A87BFC46}"/>
+                <a16:creationId xmlns:a16="http://schemas.microsoft.com/office/drawing/2014/main" id="{6DDA0A35-7B20-A298-6AB3-AFD43E01D81F}"/>
               </a:ext>
             </a:extLst>
           </p:cNvPr>
@@ -311,7 +311,7 @@
           <a:bodyPr/>
           <a:lstStyle/>
           <a:p>
-            <a:fld id="{EB57A44D-E996-4793-A24D-44D77AE500BF}" type="slidenum">
+            <a:fld id="{0DA46A8A-CA94-4CC3-8097-27B51B6BF6DE}" type="slidenum">
               <a:rPr kumimoji="1" lang="ja-JP" altLang="en-US" smtClean="0"/>
               <a:t>‹#›</a:t>
             </a:fld>
@@ -322,7 +322,7 @@
     </p:spTree>
     <p:extLst>
       <p:ext uri="{BB962C8B-B14F-4D97-AF65-F5344CB8AC3E}">
-        <p14:creationId xmlns:p14="http://schemas.microsoft.com/office/powerpoint/2010/main" val="881903860"/>
+        <p14:creationId xmlns:p14="http://schemas.microsoft.com/office/powerpoint/2010/main" val="1513777639"/>
       </p:ext>
     </p:extLst>
   </p:cSld>
@@ -354,7 +354,7 @@
           <p:cNvPr id="2" name="タイトル 1">
             <a:extLst>
               <a:ext uri="{FF2B5EF4-FFF2-40B4-BE49-F238E27FC236}">
-                <a16:creationId xmlns:a16="http://schemas.microsoft.com/office/drawing/2014/main" id="{E76E9827-AC92-3D16-A3DF-42733FBF73AC}"/>
+                <a16:creationId xmlns:a16="http://schemas.microsoft.com/office/drawing/2014/main" id="{EF0A7994-DB08-EE93-9DCD-64BD71D0F084}"/>
               </a:ext>
             </a:extLst>
           </p:cNvPr>
@@ -382,7 +382,7 @@
           <p:cNvPr id="3" name="縦書きテキスト プレースホルダー 2">
             <a:extLst>
               <a:ext uri="{FF2B5EF4-FFF2-40B4-BE49-F238E27FC236}">
-                <a16:creationId xmlns:a16="http://schemas.microsoft.com/office/drawing/2014/main" id="{7F46F90E-7030-B51D-FC81-22087773A04B}"/>
+                <a16:creationId xmlns:a16="http://schemas.microsoft.com/office/drawing/2014/main" id="{21739991-1987-B92E-1589-701CB8203B34}"/>
               </a:ext>
             </a:extLst>
           </p:cNvPr>
@@ -471,7 +471,7 @@
           <p:cNvPr id="4" name="日付プレースホルダー 3">
             <a:extLst>
               <a:ext uri="{FF2B5EF4-FFF2-40B4-BE49-F238E27FC236}">
-                <a16:creationId xmlns:a16="http://schemas.microsoft.com/office/drawing/2014/main" id="{C206EBA6-2ED3-0229-BE95-2CCDBB6A41B1}"/>
+                <a16:creationId xmlns:a16="http://schemas.microsoft.com/office/drawing/2014/main" id="{3113DDEB-6D7F-472A-2FCA-175A4564F6CE}"/>
               </a:ext>
             </a:extLst>
           </p:cNvPr>
@@ -487,7 +487,7 @@
           <a:bodyPr/>
           <a:lstStyle/>
           <a:p>
-            <a:fld id="{E020A80F-0EF2-464F-B51E-5ED015D5F829}" type="datetimeFigureOut">
+            <a:fld id="{5A73DC13-68B4-4392-81B5-A9F927C5A546}" type="datetimeFigureOut">
               <a:rPr kumimoji="1" lang="ja-JP" altLang="en-US" smtClean="0"/>
               <a:t>2026/7/30</a:t>
             </a:fld>
@@ -500,7 +500,7 @@
           <p:cNvPr id="5" name="フッター プレースホルダー 4">
             <a:extLst>
               <a:ext uri="{FF2B5EF4-FFF2-40B4-BE49-F238E27FC236}">
-                <a16:creationId xmlns:a16="http://schemas.microsoft.com/office/drawing/2014/main" id="{B4D7D626-3078-70E5-AA2A-EFB95E8145FB}"/>
+                <a16:creationId xmlns:a16="http://schemas.microsoft.com/office/drawing/2014/main" id="{C841A20A-E9C3-9C3F-DF54-01C2533A155A}"/>
               </a:ext>
             </a:extLst>
           </p:cNvPr>
@@ -525,7 +525,7 @@
           <p:cNvPr id="6" name="スライド番号プレースホルダー 5">
             <a:extLst>
               <a:ext uri="{FF2B5EF4-FFF2-40B4-BE49-F238E27FC236}">
-                <a16:creationId xmlns:a16="http://schemas.microsoft.com/office/drawing/2014/main" id="{6C5EF285-7CCA-E47F-3294-A07443FFBEA2}"/>
+                <a16:creationId xmlns:a16="http://schemas.microsoft.com/office/drawing/2014/main" id="{CA0AD36A-5343-61F6-97A4-9E6C0B27DB4C}"/>
               </a:ext>
             </a:extLst>
           </p:cNvPr>
@@ -541,7 +541,7 @@
           <a:bodyPr/>
           <a:lstStyle/>
           <a:p>
-            <a:fld id="{EB57A44D-E996-4793-A24D-44D77AE500BF}" type="slidenum">
+            <a:fld id="{0DA46A8A-CA94-4CC3-8097-27B51B6BF6DE}" type="slidenum">
               <a:rPr kumimoji="1" lang="ja-JP" altLang="en-US" smtClean="0"/>
               <a:t>‹#›</a:t>
             </a:fld>
@@ -552,7 +552,7 @@
     </p:spTree>
     <p:extLst>
       <p:ext uri="{BB962C8B-B14F-4D97-AF65-F5344CB8AC3E}">
-        <p14:creationId xmlns:p14="http://schemas.microsoft.com/office/powerpoint/2010/main" val="2929704404"/>
+        <p14:creationId xmlns:p14="http://schemas.microsoft.com/office/powerpoint/2010/main" val="2378293712"/>
       </p:ext>
     </p:extLst>
   </p:cSld>
@@ -584,7 +584,7 @@
           <p:cNvPr id="2" name="縦書きタイトル 1">
             <a:extLst>
               <a:ext uri="{FF2B5EF4-FFF2-40B4-BE49-F238E27FC236}">
-                <a16:creationId xmlns:a16="http://schemas.microsoft.com/office/drawing/2014/main" id="{55F81A02-1476-16CB-0DBE-34AB59559B86}"/>
+                <a16:creationId xmlns:a16="http://schemas.microsoft.com/office/drawing/2014/main" id="{3F9BE65A-0718-11EF-ECDF-5D40EADC561D}"/>
               </a:ext>
             </a:extLst>
           </p:cNvPr>
@@ -617,7 +617,7 @@
           <p:cNvPr id="3" name="縦書きテキスト プレースホルダー 2">
             <a:extLst>
               <a:ext uri="{FF2B5EF4-FFF2-40B4-BE49-F238E27FC236}">
-                <a16:creationId xmlns:a16="http://schemas.microsoft.com/office/drawing/2014/main" id="{89D5AF6D-3F8D-F2C5-466C-70D446339BAE}"/>
+                <a16:creationId xmlns:a16="http://schemas.microsoft.com/office/drawing/2014/main" id="{F63477DA-4CCC-A24E-D8A3-C1828A463370}"/>
               </a:ext>
             </a:extLst>
           </p:cNvPr>
@@ -711,7 +711,7 @@
           <p:cNvPr id="4" name="日付プレースホルダー 3">
             <a:extLst>
               <a:ext uri="{FF2B5EF4-FFF2-40B4-BE49-F238E27FC236}">
-                <a16:creationId xmlns:a16="http://schemas.microsoft.com/office/drawing/2014/main" id="{D899D4FD-5D5D-EECF-BC8A-F3B99B586DC0}"/>
+                <a16:creationId xmlns:a16="http://schemas.microsoft.com/office/drawing/2014/main" id="{AAB9BAAA-FCFD-EF6A-8795-2927DD8625BA}"/>
               </a:ext>
             </a:extLst>
           </p:cNvPr>
@@ -727,7 +727,7 @@
           <a:bodyPr/>
           <a:lstStyle/>
           <a:p>
-            <a:fld id="{E020A80F-0EF2-464F-B51E-5ED015D5F829}" type="datetimeFigureOut">
+            <a:fld id="{5A73DC13-68B4-4392-81B5-A9F927C5A546}" type="datetimeFigureOut">
               <a:rPr kumimoji="1" lang="ja-JP" altLang="en-US" smtClean="0"/>
               <a:t>2026/7/30</a:t>
             </a:fld>
@@ -740,7 +740,7 @@
           <p:cNvPr id="5" name="フッター プレースホルダー 4">
             <a:extLst>
               <a:ext uri="{FF2B5EF4-FFF2-40B4-BE49-F238E27FC236}">
-                <a16:creationId xmlns:a16="http://schemas.microsoft.com/office/drawing/2014/main" id="{636D2C47-819A-8D46-6E6F-C0D13C679457}"/>
+                <a16:creationId xmlns:a16="http://schemas.microsoft.com/office/drawing/2014/main" id="{C2BEC9C3-D338-3D8C-6CE9-860C3751A940}"/>
               </a:ext>
             </a:extLst>
           </p:cNvPr>
@@ -765,7 +765,7 @@
           <p:cNvPr id="6" name="スライド番号プレースホルダー 5">
             <a:extLst>
               <a:ext uri="{FF2B5EF4-FFF2-40B4-BE49-F238E27FC236}">
-                <a16:creationId xmlns:a16="http://schemas.microsoft.com/office/drawing/2014/main" id="{A3CAD02D-1915-3E90-1CB3-11ABCB3DADA7}"/>
+                <a16:creationId xmlns:a16="http://schemas.microsoft.com/office/drawing/2014/main" id="{570030FE-B49E-F762-0FFF-7BFAA3ED050E}"/>
               </a:ext>
             </a:extLst>
           </p:cNvPr>
@@ -781,7 +781,7 @@
           <a:bodyPr/>
           <a:lstStyle/>
           <a:p>
-            <a:fld id="{EB57A44D-E996-4793-A24D-44D77AE500BF}" type="slidenum">
+            <a:fld id="{0DA46A8A-CA94-4CC3-8097-27B51B6BF6DE}" type="slidenum">
               <a:rPr kumimoji="1" lang="ja-JP" altLang="en-US" smtClean="0"/>
               <a:t>‹#›</a:t>
             </a:fld>
@@ -792,7 +792,7 @@
     </p:spTree>
     <p:extLst>
       <p:ext uri="{BB962C8B-B14F-4D97-AF65-F5344CB8AC3E}">
-        <p14:creationId xmlns:p14="http://schemas.microsoft.com/office/powerpoint/2010/main" val="1715531928"/>
+        <p14:creationId xmlns:p14="http://schemas.microsoft.com/office/powerpoint/2010/main" val="1970838247"/>
       </p:ext>
     </p:extLst>
   </p:cSld>
@@ -824,7 +824,7 @@
           <p:cNvPr id="2" name="タイトル 1">
             <a:extLst>
               <a:ext uri="{FF2B5EF4-FFF2-40B4-BE49-F238E27FC236}">
-                <a16:creationId xmlns:a16="http://schemas.microsoft.com/office/drawing/2014/main" id="{25282582-444D-58E3-9B85-41BA5A6DA848}"/>
+                <a16:creationId xmlns:a16="http://schemas.microsoft.com/office/drawing/2014/main" id="{14C7C064-BCE2-2AF3-E551-C90B632E715B}"/>
               </a:ext>
             </a:extLst>
           </p:cNvPr>
@@ -852,7 +852,7 @@
           <p:cNvPr id="3" name="コンテンツ プレースホルダー 2">
             <a:extLst>
               <a:ext uri="{FF2B5EF4-FFF2-40B4-BE49-F238E27FC236}">
-                <a16:creationId xmlns:a16="http://schemas.microsoft.com/office/drawing/2014/main" id="{7330AD73-F9AA-898A-BCCD-7CC76818C158}"/>
+                <a16:creationId xmlns:a16="http://schemas.microsoft.com/office/drawing/2014/main" id="{7138B3C4-9D10-DFD4-F9E4-E3B154C3264B}"/>
               </a:ext>
             </a:extLst>
           </p:cNvPr>
@@ -941,7 +941,7 @@
           <p:cNvPr id="4" name="日付プレースホルダー 3">
             <a:extLst>
               <a:ext uri="{FF2B5EF4-FFF2-40B4-BE49-F238E27FC236}">
-                <a16:creationId xmlns:a16="http://schemas.microsoft.com/office/drawing/2014/main" id="{EED22031-CE3D-5667-EB9F-C1A162032D2E}"/>
+                <a16:creationId xmlns:a16="http://schemas.microsoft.com/office/drawing/2014/main" id="{272DA424-C9B5-2247-076D-669EE739BFD5}"/>
               </a:ext>
             </a:extLst>
           </p:cNvPr>
@@ -957,7 +957,7 @@
           <a:bodyPr/>
           <a:lstStyle/>
           <a:p>
-            <a:fld id="{E020A80F-0EF2-464F-B51E-5ED015D5F829}" type="datetimeFigureOut">
+            <a:fld id="{5A73DC13-68B4-4392-81B5-A9F927C5A546}" type="datetimeFigureOut">
               <a:rPr kumimoji="1" lang="ja-JP" altLang="en-US" smtClean="0"/>
               <a:t>2026/7/30</a:t>
             </a:fld>
@@ -970,7 +970,7 @@
           <p:cNvPr id="5" name="フッター プレースホルダー 4">
             <a:extLst>
               <a:ext uri="{FF2B5EF4-FFF2-40B4-BE49-F238E27FC236}">
-                <a16:creationId xmlns:a16="http://schemas.microsoft.com/office/drawing/2014/main" id="{05817BEF-906A-3977-FE75-44048D5BEA56}"/>
+                <a16:creationId xmlns:a16="http://schemas.microsoft.com/office/drawing/2014/main" id="{3041B71F-EB40-13A6-8C11-46AA5F7B194A}"/>
               </a:ext>
             </a:extLst>
           </p:cNvPr>
@@ -995,7 +995,7 @@
           <p:cNvPr id="6" name="スライド番号プレースホルダー 5">
             <a:extLst>
               <a:ext uri="{FF2B5EF4-FFF2-40B4-BE49-F238E27FC236}">
-                <a16:creationId xmlns:a16="http://schemas.microsoft.com/office/drawing/2014/main" id="{FBFA012A-A0B8-11B1-CDD8-7F75A87804A2}"/>
+                <a16:creationId xmlns:a16="http://schemas.microsoft.com/office/drawing/2014/main" id="{3BB0073F-8F58-E506-837F-05B4338934A7}"/>
               </a:ext>
             </a:extLst>
           </p:cNvPr>
@@ -1011,7 +1011,7 @@
           <a:bodyPr/>
           <a:lstStyle/>
           <a:p>
-            <a:fld id="{EB57A44D-E996-4793-A24D-44D77AE500BF}" type="slidenum">
+            <a:fld id="{0DA46A8A-CA94-4CC3-8097-27B51B6BF6DE}" type="slidenum">
               <a:rPr kumimoji="1" lang="ja-JP" altLang="en-US" smtClean="0"/>
               <a:t>‹#›</a:t>
             </a:fld>
@@ -1022,7 +1022,7 @@
     </p:spTree>
     <p:extLst>
       <p:ext uri="{BB962C8B-B14F-4D97-AF65-F5344CB8AC3E}">
-        <p14:creationId xmlns:p14="http://schemas.microsoft.com/office/powerpoint/2010/main" val="970065969"/>
+        <p14:creationId xmlns:p14="http://schemas.microsoft.com/office/powerpoint/2010/main" val="1801509647"/>
       </p:ext>
     </p:extLst>
   </p:cSld>
@@ -1054,7 +1054,7 @@
           <p:cNvPr id="2" name="タイトル 1">
             <a:extLst>
               <a:ext uri="{FF2B5EF4-FFF2-40B4-BE49-F238E27FC236}">
-                <a16:creationId xmlns:a16="http://schemas.microsoft.com/office/drawing/2014/main" id="{FF05E622-74BA-02C1-AE87-4D0336715C1B}"/>
+                <a16:creationId xmlns:a16="http://schemas.microsoft.com/office/drawing/2014/main" id="{B7774182-AF44-DC5F-5E0D-D7DD7E6BE754}"/>
               </a:ext>
             </a:extLst>
           </p:cNvPr>
@@ -1091,7 +1091,7 @@
           <p:cNvPr id="3" name="テキスト プレースホルダー 2">
             <a:extLst>
               <a:ext uri="{FF2B5EF4-FFF2-40B4-BE49-F238E27FC236}">
-                <a16:creationId xmlns:a16="http://schemas.microsoft.com/office/drawing/2014/main" id="{9B752429-5FB8-F777-D5F1-45FE6F5E8770}"/>
+                <a16:creationId xmlns:a16="http://schemas.microsoft.com/office/drawing/2014/main" id="{EE63E591-2109-F120-C122-C17556BF95CF}"/>
               </a:ext>
             </a:extLst>
           </p:cNvPr>
@@ -1216,7 +1216,7 @@
           <p:cNvPr id="4" name="日付プレースホルダー 3">
             <a:extLst>
               <a:ext uri="{FF2B5EF4-FFF2-40B4-BE49-F238E27FC236}">
-                <a16:creationId xmlns:a16="http://schemas.microsoft.com/office/drawing/2014/main" id="{73BDC955-1742-90FE-B181-CED60F5EA58B}"/>
+                <a16:creationId xmlns:a16="http://schemas.microsoft.com/office/drawing/2014/main" id="{FA0A3B7A-982E-1400-745E-E315D684495D}"/>
               </a:ext>
             </a:extLst>
           </p:cNvPr>
@@ -1232,7 +1232,7 @@
           <a:bodyPr/>
           <a:lstStyle/>
           <a:p>
-            <a:fld id="{E020A80F-0EF2-464F-B51E-5ED015D5F829}" type="datetimeFigureOut">
+            <a:fld id="{5A73DC13-68B4-4392-81B5-A9F927C5A546}" type="datetimeFigureOut">
               <a:rPr kumimoji="1" lang="ja-JP" altLang="en-US" smtClean="0"/>
               <a:t>2026/7/30</a:t>
             </a:fld>
@@ -1245,7 +1245,7 @@
           <p:cNvPr id="5" name="フッター プレースホルダー 4">
             <a:extLst>
               <a:ext uri="{FF2B5EF4-FFF2-40B4-BE49-F238E27FC236}">
-                <a16:creationId xmlns:a16="http://schemas.microsoft.com/office/drawing/2014/main" id="{686D039D-71B5-1FF1-A702-9F8A2E68649C}"/>
+                <a16:creationId xmlns:a16="http://schemas.microsoft.com/office/drawing/2014/main" id="{890DEA65-2B79-2604-6D83-1563F390BE91}"/>
               </a:ext>
             </a:extLst>
           </p:cNvPr>
@@ -1270,7 +1270,7 @@
           <p:cNvPr id="6" name="スライド番号プレースホルダー 5">
             <a:extLst>
               <a:ext uri="{FF2B5EF4-FFF2-40B4-BE49-F238E27FC236}">
-                <a16:creationId xmlns:a16="http://schemas.microsoft.com/office/drawing/2014/main" id="{01788109-E481-3F8C-C673-0650C7C8076E}"/>
+                <a16:creationId xmlns:a16="http://schemas.microsoft.com/office/drawing/2014/main" id="{F3530582-5E8A-E612-1B3E-16B2F7DB99F6}"/>
               </a:ext>
             </a:extLst>
           </p:cNvPr>
@@ -1286,7 +1286,7 @@
           <a:bodyPr/>
           <a:lstStyle/>
           <a:p>
-            <a:fld id="{EB57A44D-E996-4793-A24D-44D77AE500BF}" type="slidenum">
+            <a:fld id="{0DA46A8A-CA94-4CC3-8097-27B51B6BF6DE}" type="slidenum">
               <a:rPr kumimoji="1" lang="ja-JP" altLang="en-US" smtClean="0"/>
               <a:t>‹#›</a:t>
             </a:fld>
@@ -1297,7 +1297,7 @@
     </p:spTree>
     <p:extLst>
       <p:ext uri="{BB962C8B-B14F-4D97-AF65-F5344CB8AC3E}">
-        <p14:creationId xmlns:p14="http://schemas.microsoft.com/office/powerpoint/2010/main" val="1666793436"/>
+        <p14:creationId xmlns:p14="http://schemas.microsoft.com/office/powerpoint/2010/main" val="3686941187"/>
       </p:ext>
     </p:extLst>
   </p:cSld>
@@ -1329,7 +1329,7 @@
           <p:cNvPr id="2" name="タイトル 1">
             <a:extLst>
               <a:ext uri="{FF2B5EF4-FFF2-40B4-BE49-F238E27FC236}">
-                <a16:creationId xmlns:a16="http://schemas.microsoft.com/office/drawing/2014/main" id="{641C0752-A3EC-C507-B4CA-CAFD21C17C30}"/>
+                <a16:creationId xmlns:a16="http://schemas.microsoft.com/office/drawing/2014/main" id="{54D4178E-B53D-302C-7F9B-4A6F82E6B325}"/>
               </a:ext>
             </a:extLst>
           </p:cNvPr>
@@ -1357,7 +1357,7 @@
           <p:cNvPr id="3" name="コンテンツ プレースホルダー 2">
             <a:extLst>
               <a:ext uri="{FF2B5EF4-FFF2-40B4-BE49-F238E27FC236}">
-                <a16:creationId xmlns:a16="http://schemas.microsoft.com/office/drawing/2014/main" id="{D1C7A02D-3566-E655-95F6-34D00F920C4D}"/>
+                <a16:creationId xmlns:a16="http://schemas.microsoft.com/office/drawing/2014/main" id="{8099F67D-132F-1EE1-4E82-9E0865836D01}"/>
               </a:ext>
             </a:extLst>
           </p:cNvPr>
@@ -1451,7 +1451,7 @@
           <p:cNvPr id="4" name="コンテンツ プレースホルダー 3">
             <a:extLst>
               <a:ext uri="{FF2B5EF4-FFF2-40B4-BE49-F238E27FC236}">
-                <a16:creationId xmlns:a16="http://schemas.microsoft.com/office/drawing/2014/main" id="{7B32CDFE-EBCD-7189-565E-6ED9E9BC77DE}"/>
+                <a16:creationId xmlns:a16="http://schemas.microsoft.com/office/drawing/2014/main" id="{55699F82-697F-2556-C584-C3BB98BA864E}"/>
               </a:ext>
             </a:extLst>
           </p:cNvPr>
@@ -1545,7 +1545,7 @@
           <p:cNvPr id="5" name="日付プレースホルダー 4">
             <a:extLst>
               <a:ext uri="{FF2B5EF4-FFF2-40B4-BE49-F238E27FC236}">
-                <a16:creationId xmlns:a16="http://schemas.microsoft.com/office/drawing/2014/main" id="{8F12A462-D3AE-705C-6F40-7AE2B69FC1E8}"/>
+                <a16:creationId xmlns:a16="http://schemas.microsoft.com/office/drawing/2014/main" id="{3AC91A80-EB69-8314-3EB8-B503F1D47BF6}"/>
               </a:ext>
             </a:extLst>
           </p:cNvPr>
@@ -1561,7 +1561,7 @@
           <a:bodyPr/>
           <a:lstStyle/>
           <a:p>
-            <a:fld id="{E020A80F-0EF2-464F-B51E-5ED015D5F829}" type="datetimeFigureOut">
+            <a:fld id="{5A73DC13-68B4-4392-81B5-A9F927C5A546}" type="datetimeFigureOut">
               <a:rPr kumimoji="1" lang="ja-JP" altLang="en-US" smtClean="0"/>
               <a:t>2026/7/30</a:t>
             </a:fld>
@@ -1574,7 +1574,7 @@
           <p:cNvPr id="6" name="フッター プレースホルダー 5">
             <a:extLst>
               <a:ext uri="{FF2B5EF4-FFF2-40B4-BE49-F238E27FC236}">
-                <a16:creationId xmlns:a16="http://schemas.microsoft.com/office/drawing/2014/main" id="{231A6608-6882-AE9D-11DE-47FB90DEF0C7}"/>
+                <a16:creationId xmlns:a16="http://schemas.microsoft.com/office/drawing/2014/main" id="{BA37BEFC-51D5-4AED-C9B8-5A9F0CB9B89D}"/>
               </a:ext>
             </a:extLst>
           </p:cNvPr>
@@ -1599,7 +1599,7 @@
           <p:cNvPr id="7" name="スライド番号プレースホルダー 6">
             <a:extLst>
               <a:ext uri="{FF2B5EF4-FFF2-40B4-BE49-F238E27FC236}">
-                <a16:creationId xmlns:a16="http://schemas.microsoft.com/office/drawing/2014/main" id="{296FE5DD-2123-1597-427F-51B434CE9C9E}"/>
+                <a16:creationId xmlns:a16="http://schemas.microsoft.com/office/drawing/2014/main" id="{42D7B6DD-EBEE-4C45-9D2B-A469A22D5760}"/>
               </a:ext>
             </a:extLst>
           </p:cNvPr>
@@ -1615,7 +1615,7 @@
           <a:bodyPr/>
           <a:lstStyle/>
           <a:p>
-            <a:fld id="{EB57A44D-E996-4793-A24D-44D77AE500BF}" type="slidenum">
+            <a:fld id="{0DA46A8A-CA94-4CC3-8097-27B51B6BF6DE}" type="slidenum">
               <a:rPr kumimoji="1" lang="ja-JP" altLang="en-US" smtClean="0"/>
               <a:t>‹#›</a:t>
             </a:fld>
@@ -1626,7 +1626,7 @@
     </p:spTree>
     <p:extLst>
       <p:ext uri="{BB962C8B-B14F-4D97-AF65-F5344CB8AC3E}">
-        <p14:creationId xmlns:p14="http://schemas.microsoft.com/office/powerpoint/2010/main" val="110100788"/>
+        <p14:creationId xmlns:p14="http://schemas.microsoft.com/office/powerpoint/2010/main" val="3860121174"/>
       </p:ext>
     </p:extLst>
   </p:cSld>
@@ -1658,7 +1658,7 @@
           <p:cNvPr id="2" name="タイトル 1">
             <a:extLst>
               <a:ext uri="{FF2B5EF4-FFF2-40B4-BE49-F238E27FC236}">
-                <a16:creationId xmlns:a16="http://schemas.microsoft.com/office/drawing/2014/main" id="{B0ABBACF-28A3-4405-4799-F31467F612EA}"/>
+                <a16:creationId xmlns:a16="http://schemas.microsoft.com/office/drawing/2014/main" id="{D9E203B7-EC72-1C13-F197-AB97FD5726A0}"/>
               </a:ext>
             </a:extLst>
           </p:cNvPr>
@@ -1691,7 +1691,7 @@
           <p:cNvPr id="3" name="テキスト プレースホルダー 2">
             <a:extLst>
               <a:ext uri="{FF2B5EF4-FFF2-40B4-BE49-F238E27FC236}">
-                <a16:creationId xmlns:a16="http://schemas.microsoft.com/office/drawing/2014/main" id="{F375C7A8-26C9-9325-0FEC-133E43001B65}"/>
+                <a16:creationId xmlns:a16="http://schemas.microsoft.com/office/drawing/2014/main" id="{DEA98688-1CDC-7C85-BF93-5E3D52E2AD73}"/>
               </a:ext>
             </a:extLst>
           </p:cNvPr>
@@ -1762,7 +1762,7 @@
           <p:cNvPr id="4" name="コンテンツ プレースホルダー 3">
             <a:extLst>
               <a:ext uri="{FF2B5EF4-FFF2-40B4-BE49-F238E27FC236}">
-                <a16:creationId xmlns:a16="http://schemas.microsoft.com/office/drawing/2014/main" id="{D9DEF91F-5D80-9736-5D27-07F8BA385A75}"/>
+                <a16:creationId xmlns:a16="http://schemas.microsoft.com/office/drawing/2014/main" id="{25EE2DE7-05FA-A979-3F06-CCEBFF7A4520}"/>
               </a:ext>
             </a:extLst>
           </p:cNvPr>
@@ -1856,7 +1856,7 @@
           <p:cNvPr id="5" name="テキスト プレースホルダー 4">
             <a:extLst>
               <a:ext uri="{FF2B5EF4-FFF2-40B4-BE49-F238E27FC236}">
-                <a16:creationId xmlns:a16="http://schemas.microsoft.com/office/drawing/2014/main" id="{D3328A85-7C37-6D03-E1DB-FF995D2BB2FF}"/>
+                <a16:creationId xmlns:a16="http://schemas.microsoft.com/office/drawing/2014/main" id="{242CBE79-F560-0EFF-3AC2-7CC15275E2DA}"/>
               </a:ext>
             </a:extLst>
           </p:cNvPr>
@@ -1927,7 +1927,7 @@
           <p:cNvPr id="6" name="コンテンツ プレースホルダー 5">
             <a:extLst>
               <a:ext uri="{FF2B5EF4-FFF2-40B4-BE49-F238E27FC236}">
-                <a16:creationId xmlns:a16="http://schemas.microsoft.com/office/drawing/2014/main" id="{A7670AA4-08A6-555D-4AB8-CD29A7557D99}"/>
+                <a16:creationId xmlns:a16="http://schemas.microsoft.com/office/drawing/2014/main" id="{1AA628C1-F400-8751-1D67-3391AC2604ED}"/>
               </a:ext>
             </a:extLst>
           </p:cNvPr>
@@ -2021,7 +2021,7 @@
           <p:cNvPr id="7" name="日付プレースホルダー 6">
             <a:extLst>
               <a:ext uri="{FF2B5EF4-FFF2-40B4-BE49-F238E27FC236}">
-                <a16:creationId xmlns:a16="http://schemas.microsoft.com/office/drawing/2014/main" id="{9238C81B-3753-F24D-88E5-41B1271549B7}"/>
+                <a16:creationId xmlns:a16="http://schemas.microsoft.com/office/drawing/2014/main" id="{813326E6-3D16-DF7E-021B-82DF1104D2F6}"/>
               </a:ext>
             </a:extLst>
           </p:cNvPr>
@@ -2037,7 +2037,7 @@
           <a:bodyPr/>
           <a:lstStyle/>
           <a:p>
-            <a:fld id="{E020A80F-0EF2-464F-B51E-5ED015D5F829}" type="datetimeFigureOut">
+            <a:fld id="{5A73DC13-68B4-4392-81B5-A9F927C5A546}" type="datetimeFigureOut">
               <a:rPr kumimoji="1" lang="ja-JP" altLang="en-US" smtClean="0"/>
               <a:t>2026/7/30</a:t>
             </a:fld>
@@ -2050,7 +2050,7 @@
           <p:cNvPr id="8" name="フッター プレースホルダー 7">
             <a:extLst>
               <a:ext uri="{FF2B5EF4-FFF2-40B4-BE49-F238E27FC236}">
-                <a16:creationId xmlns:a16="http://schemas.microsoft.com/office/drawing/2014/main" id="{6286B7E2-A1FE-893C-4DD1-7C1C179ED809}"/>
+                <a16:creationId xmlns:a16="http://schemas.microsoft.com/office/drawing/2014/main" id="{BFD21D8D-828C-D630-EE69-BB8C9552FC1C}"/>
               </a:ext>
             </a:extLst>
           </p:cNvPr>
@@ -2075,7 +2075,7 @@
           <p:cNvPr id="9" name="スライド番号プレースホルダー 8">
             <a:extLst>
               <a:ext uri="{FF2B5EF4-FFF2-40B4-BE49-F238E27FC236}">
-                <a16:creationId xmlns:a16="http://schemas.microsoft.com/office/drawing/2014/main" id="{89832AE1-E9FD-4623-F5FF-92B8F00DF441}"/>
+                <a16:creationId xmlns:a16="http://schemas.microsoft.com/office/drawing/2014/main" id="{0CFC1FAD-BD04-8473-9B40-395CB7AE7634}"/>
               </a:ext>
             </a:extLst>
           </p:cNvPr>
@@ -2091,7 +2091,7 @@
           <a:bodyPr/>
           <a:lstStyle/>
           <a:p>
-            <a:fld id="{EB57A44D-E996-4793-A24D-44D77AE500BF}" type="slidenum">
+            <a:fld id="{0DA46A8A-CA94-4CC3-8097-27B51B6BF6DE}" type="slidenum">
               <a:rPr kumimoji="1" lang="ja-JP" altLang="en-US" smtClean="0"/>
               <a:t>‹#›</a:t>
             </a:fld>
@@ -2102,7 +2102,7 @@
     </p:spTree>
     <p:extLst>
       <p:ext uri="{BB962C8B-B14F-4D97-AF65-F5344CB8AC3E}">
-        <p14:creationId xmlns:p14="http://schemas.microsoft.com/office/powerpoint/2010/main" val="3434991905"/>
+        <p14:creationId xmlns:p14="http://schemas.microsoft.com/office/powerpoint/2010/main" val="2614172566"/>
       </p:ext>
     </p:extLst>
   </p:cSld>
@@ -2134,7 +2134,7 @@
           <p:cNvPr id="2" name="タイトル 1">
             <a:extLst>
               <a:ext uri="{FF2B5EF4-FFF2-40B4-BE49-F238E27FC236}">
-                <a16:creationId xmlns:a16="http://schemas.microsoft.com/office/drawing/2014/main" id="{E7D876C8-C372-1A83-F016-15DD8DEB4BEE}"/>
+                <a16:creationId xmlns:a16="http://schemas.microsoft.com/office/drawing/2014/main" id="{DD084D1C-07F1-EE42-15E5-6B850F990D30}"/>
               </a:ext>
             </a:extLst>
           </p:cNvPr>
@@ -2162,7 +2162,7 @@
           <p:cNvPr id="3" name="日付プレースホルダー 2">
             <a:extLst>
               <a:ext uri="{FF2B5EF4-FFF2-40B4-BE49-F238E27FC236}">
-                <a16:creationId xmlns:a16="http://schemas.microsoft.com/office/drawing/2014/main" id="{9AF00A92-FEAC-D340-88CF-250A67D558C5}"/>
+                <a16:creationId xmlns:a16="http://schemas.microsoft.com/office/drawing/2014/main" id="{060F936D-6B31-B87B-640D-4981D5E04F75}"/>
               </a:ext>
             </a:extLst>
           </p:cNvPr>
@@ -2178,7 +2178,7 @@
           <a:bodyPr/>
           <a:lstStyle/>
           <a:p>
-            <a:fld id="{E020A80F-0EF2-464F-B51E-5ED015D5F829}" type="datetimeFigureOut">
+            <a:fld id="{5A73DC13-68B4-4392-81B5-A9F927C5A546}" type="datetimeFigureOut">
               <a:rPr kumimoji="1" lang="ja-JP" altLang="en-US" smtClean="0"/>
               <a:t>2026/7/30</a:t>
             </a:fld>
@@ -2191,7 +2191,7 @@
           <p:cNvPr id="4" name="フッター プレースホルダー 3">
             <a:extLst>
               <a:ext uri="{FF2B5EF4-FFF2-40B4-BE49-F238E27FC236}">
-                <a16:creationId xmlns:a16="http://schemas.microsoft.com/office/drawing/2014/main" id="{0B8A0B22-0938-3288-E443-0778DB43905A}"/>
+                <a16:creationId xmlns:a16="http://schemas.microsoft.com/office/drawing/2014/main" id="{11BDC1C5-8209-B090-8228-280B59ED5B4F}"/>
               </a:ext>
             </a:extLst>
           </p:cNvPr>
@@ -2216,7 +2216,7 @@
           <p:cNvPr id="5" name="スライド番号プレースホルダー 4">
             <a:extLst>
               <a:ext uri="{FF2B5EF4-FFF2-40B4-BE49-F238E27FC236}">
-                <a16:creationId xmlns:a16="http://schemas.microsoft.com/office/drawing/2014/main" id="{94DBB700-D145-3950-3402-70BBDB7CA3C2}"/>
+                <a16:creationId xmlns:a16="http://schemas.microsoft.com/office/drawing/2014/main" id="{186BE35B-54C9-FAA5-1352-2CEB55DF18F5}"/>
               </a:ext>
             </a:extLst>
           </p:cNvPr>
@@ -2232,7 +2232,7 @@
           <a:bodyPr/>
           <a:lstStyle/>
           <a:p>
-            <a:fld id="{EB57A44D-E996-4793-A24D-44D77AE500BF}" type="slidenum">
+            <a:fld id="{0DA46A8A-CA94-4CC3-8097-27B51B6BF6DE}" type="slidenum">
               <a:rPr kumimoji="1" lang="ja-JP" altLang="en-US" smtClean="0"/>
               <a:t>‹#›</a:t>
             </a:fld>
@@ -2243,7 +2243,7 @@
     </p:spTree>
     <p:extLst>
       <p:ext uri="{BB962C8B-B14F-4D97-AF65-F5344CB8AC3E}">
-        <p14:creationId xmlns:p14="http://schemas.microsoft.com/office/powerpoint/2010/main" val="948389652"/>
+        <p14:creationId xmlns:p14="http://schemas.microsoft.com/office/powerpoint/2010/main" val="2250654536"/>
       </p:ext>
     </p:extLst>
   </p:cSld>
@@ -2275,7 +2275,7 @@
           <p:cNvPr id="2" name="日付プレースホルダー 1">
             <a:extLst>
               <a:ext uri="{FF2B5EF4-FFF2-40B4-BE49-F238E27FC236}">
-                <a16:creationId xmlns:a16="http://schemas.microsoft.com/office/drawing/2014/main" id="{4EEEC84D-40AF-8440-52B6-E86C8EEC3B19}"/>
+                <a16:creationId xmlns:a16="http://schemas.microsoft.com/office/drawing/2014/main" id="{E95B3636-3025-9702-3705-D385CC5AD8EE}"/>
               </a:ext>
             </a:extLst>
           </p:cNvPr>
@@ -2291,7 +2291,7 @@
           <a:bodyPr/>
           <a:lstStyle/>
           <a:p>
-            <a:fld id="{E020A80F-0EF2-464F-B51E-5ED015D5F829}" type="datetimeFigureOut">
+            <a:fld id="{5A73DC13-68B4-4392-81B5-A9F927C5A546}" type="datetimeFigureOut">
               <a:rPr kumimoji="1" lang="ja-JP" altLang="en-US" smtClean="0"/>
               <a:t>2026/7/30</a:t>
             </a:fld>
@@ -2304,7 +2304,7 @@
           <p:cNvPr id="3" name="フッター プレースホルダー 2">
             <a:extLst>
               <a:ext uri="{FF2B5EF4-FFF2-40B4-BE49-F238E27FC236}">
-                <a16:creationId xmlns:a16="http://schemas.microsoft.com/office/drawing/2014/main" id="{9F036EA7-E5DE-0417-D054-16C676103D44}"/>
+                <a16:creationId xmlns:a16="http://schemas.microsoft.com/office/drawing/2014/main" id="{AB99C19C-AC81-5300-B504-C15DBA82EC12}"/>
               </a:ext>
             </a:extLst>
           </p:cNvPr>
@@ -2329,7 +2329,7 @@
           <p:cNvPr id="4" name="スライド番号プレースホルダー 3">
             <a:extLst>
               <a:ext uri="{FF2B5EF4-FFF2-40B4-BE49-F238E27FC236}">
-                <a16:creationId xmlns:a16="http://schemas.microsoft.com/office/drawing/2014/main" id="{10A3652A-1978-BEE2-D86D-B7BBF7854958}"/>
+                <a16:creationId xmlns:a16="http://schemas.microsoft.com/office/drawing/2014/main" id="{F4054EA5-58B2-3A16-761D-071C266CEF12}"/>
               </a:ext>
             </a:extLst>
           </p:cNvPr>
@@ -2345,7 +2345,7 @@
           <a:bodyPr/>
           <a:lstStyle/>
           <a:p>
-            <a:fld id="{EB57A44D-E996-4793-A24D-44D77AE500BF}" type="slidenum">
+            <a:fld id="{0DA46A8A-CA94-4CC3-8097-27B51B6BF6DE}" type="slidenum">
               <a:rPr kumimoji="1" lang="ja-JP" altLang="en-US" smtClean="0"/>
               <a:t>‹#›</a:t>
             </a:fld>
@@ -2356,7 +2356,7 @@
     </p:spTree>
     <p:extLst>
       <p:ext uri="{BB962C8B-B14F-4D97-AF65-F5344CB8AC3E}">
-        <p14:creationId xmlns:p14="http://schemas.microsoft.com/office/powerpoint/2010/main" val="2561733169"/>
+        <p14:creationId xmlns:p14="http://schemas.microsoft.com/office/powerpoint/2010/main" val="4198133334"/>
       </p:ext>
     </p:extLst>
   </p:cSld>
@@ -2388,7 +2388,7 @@
           <p:cNvPr id="2" name="タイトル 1">
             <a:extLst>
               <a:ext uri="{FF2B5EF4-FFF2-40B4-BE49-F238E27FC236}">
-                <a16:creationId xmlns:a16="http://schemas.microsoft.com/office/drawing/2014/main" id="{F81E9958-A053-FC6C-C0A3-5FF3111674DC}"/>
+                <a16:creationId xmlns:a16="http://schemas.microsoft.com/office/drawing/2014/main" id="{803AE5DC-9636-9C13-3B6E-555CD05BE36A}"/>
               </a:ext>
             </a:extLst>
           </p:cNvPr>
@@ -2425,7 +2425,7 @@
           <p:cNvPr id="3" name="コンテンツ プレースホルダー 2">
             <a:extLst>
               <a:ext uri="{FF2B5EF4-FFF2-40B4-BE49-F238E27FC236}">
-                <a16:creationId xmlns:a16="http://schemas.microsoft.com/office/drawing/2014/main" id="{1DC9B74E-1958-03F4-0069-C9AEB64AD342}"/>
+                <a16:creationId xmlns:a16="http://schemas.microsoft.com/office/drawing/2014/main" id="{07D67844-FC76-B7A7-73F0-2FFC48D6163D}"/>
               </a:ext>
             </a:extLst>
           </p:cNvPr>
@@ -2547,7 +2547,7 @@
           <p:cNvPr id="4" name="テキスト プレースホルダー 3">
             <a:extLst>
               <a:ext uri="{FF2B5EF4-FFF2-40B4-BE49-F238E27FC236}">
-                <a16:creationId xmlns:a16="http://schemas.microsoft.com/office/drawing/2014/main" id="{C24A1E3E-573F-8907-AB80-90D397AC052D}"/>
+                <a16:creationId xmlns:a16="http://schemas.microsoft.com/office/drawing/2014/main" id="{E55C282F-E9F7-93F8-1DD3-9F7C3BAC6A0D}"/>
               </a:ext>
             </a:extLst>
           </p:cNvPr>
@@ -2618,7 +2618,7 @@
           <p:cNvPr id="5" name="日付プレースホルダー 4">
             <a:extLst>
               <a:ext uri="{FF2B5EF4-FFF2-40B4-BE49-F238E27FC236}">
-                <a16:creationId xmlns:a16="http://schemas.microsoft.com/office/drawing/2014/main" id="{C1A82DFC-F7B6-C5F8-2B01-05B0606C9DCA}"/>
+                <a16:creationId xmlns:a16="http://schemas.microsoft.com/office/drawing/2014/main" id="{3FA9E944-5845-100E-38A7-9F28D8F3DE49}"/>
               </a:ext>
             </a:extLst>
           </p:cNvPr>
@@ -2634,7 +2634,7 @@
           <a:bodyPr/>
           <a:lstStyle/>
           <a:p>
-            <a:fld id="{E020A80F-0EF2-464F-B51E-5ED015D5F829}" type="datetimeFigureOut">
+            <a:fld id="{5A73DC13-68B4-4392-81B5-A9F927C5A546}" type="datetimeFigureOut">
               <a:rPr kumimoji="1" lang="ja-JP" altLang="en-US" smtClean="0"/>
               <a:t>2026/7/30</a:t>
             </a:fld>
@@ -2647,7 +2647,7 @@
           <p:cNvPr id="6" name="フッター プレースホルダー 5">
             <a:extLst>
               <a:ext uri="{FF2B5EF4-FFF2-40B4-BE49-F238E27FC236}">
-                <a16:creationId xmlns:a16="http://schemas.microsoft.com/office/drawing/2014/main" id="{F8DB2CDD-0DBC-8F42-C979-E70D70580CA3}"/>
+                <a16:creationId xmlns:a16="http://schemas.microsoft.com/office/drawing/2014/main" id="{F81EB15C-A429-69A3-6EB3-14E33E9DE8AB}"/>
               </a:ext>
             </a:extLst>
           </p:cNvPr>
@@ -2672,7 +2672,7 @@
           <p:cNvPr id="7" name="スライド番号プレースホルダー 6">
             <a:extLst>
               <a:ext uri="{FF2B5EF4-FFF2-40B4-BE49-F238E27FC236}">
-                <a16:creationId xmlns:a16="http://schemas.microsoft.com/office/drawing/2014/main" id="{09481490-204F-8B58-07AD-A65B19FE848B}"/>
+                <a16:creationId xmlns:a16="http://schemas.microsoft.com/office/drawing/2014/main" id="{F1404FFD-6EFE-3713-D6ED-AF071B11EB29}"/>
               </a:ext>
             </a:extLst>
           </p:cNvPr>
@@ -2688,7 +2688,7 @@
           <a:bodyPr/>
           <a:lstStyle/>
           <a:p>
-            <a:fld id="{EB57A44D-E996-4793-A24D-44D77AE500BF}" type="slidenum">
+            <a:fld id="{0DA46A8A-CA94-4CC3-8097-27B51B6BF6DE}" type="slidenum">
               <a:rPr kumimoji="1" lang="ja-JP" altLang="en-US" smtClean="0"/>
               <a:t>‹#›</a:t>
             </a:fld>
@@ -2699,7 +2699,7 @@
     </p:spTree>
     <p:extLst>
       <p:ext uri="{BB962C8B-B14F-4D97-AF65-F5344CB8AC3E}">
-        <p14:creationId xmlns:p14="http://schemas.microsoft.com/office/powerpoint/2010/main" val="1392079440"/>
+        <p14:creationId xmlns:p14="http://schemas.microsoft.com/office/powerpoint/2010/main" val="2373054680"/>
       </p:ext>
     </p:extLst>
   </p:cSld>
@@ -2731,7 +2731,7 @@
           <p:cNvPr id="2" name="タイトル 1">
             <a:extLst>
               <a:ext uri="{FF2B5EF4-FFF2-40B4-BE49-F238E27FC236}">
-                <a16:creationId xmlns:a16="http://schemas.microsoft.com/office/drawing/2014/main" id="{21007ACA-334C-22D2-2813-A17BE0363ECF}"/>
+                <a16:creationId xmlns:a16="http://schemas.microsoft.com/office/drawing/2014/main" id="{71790BF1-CEB1-AA40-8560-F276D1BA109F}"/>
               </a:ext>
             </a:extLst>
           </p:cNvPr>
@@ -2768,7 +2768,7 @@
           <p:cNvPr id="3" name="図プレースホルダー 2">
             <a:extLst>
               <a:ext uri="{FF2B5EF4-FFF2-40B4-BE49-F238E27FC236}">
-                <a16:creationId xmlns:a16="http://schemas.microsoft.com/office/drawing/2014/main" id="{227D0791-F2EE-5CC3-AA7A-CB724F0E66F0}"/>
+                <a16:creationId xmlns:a16="http://schemas.microsoft.com/office/drawing/2014/main" id="{62001FFE-3FBB-F354-668D-54C6B525CF68}"/>
               </a:ext>
             </a:extLst>
           </p:cNvPr>
@@ -2835,7 +2835,7 @@
           <p:cNvPr id="4" name="テキスト プレースホルダー 3">
             <a:extLst>
               <a:ext uri="{FF2B5EF4-FFF2-40B4-BE49-F238E27FC236}">
-                <a16:creationId xmlns:a16="http://schemas.microsoft.com/office/drawing/2014/main" id="{47629BC1-02BC-5D93-260A-E117DC7118EF}"/>
+                <a16:creationId xmlns:a16="http://schemas.microsoft.com/office/drawing/2014/main" id="{E0D3B052-89C8-3E76-96BD-B48F1541C07D}"/>
               </a:ext>
             </a:extLst>
           </p:cNvPr>
@@ -2906,7 +2906,7 @@
           <p:cNvPr id="5" name="日付プレースホルダー 4">
             <a:extLst>
               <a:ext uri="{FF2B5EF4-FFF2-40B4-BE49-F238E27FC236}">
-                <a16:creationId xmlns:a16="http://schemas.microsoft.com/office/drawing/2014/main" id="{9130B128-742E-9CCF-B11F-304D6376F5B0}"/>
+                <a16:creationId xmlns:a16="http://schemas.microsoft.com/office/drawing/2014/main" id="{07795F56-77A8-B451-5B1F-B9CC45B16A9A}"/>
               </a:ext>
             </a:extLst>
           </p:cNvPr>
@@ -2922,7 +2922,7 @@
           <a:bodyPr/>
           <a:lstStyle/>
           <a:p>
-            <a:fld id="{E020A80F-0EF2-464F-B51E-5ED015D5F829}" type="datetimeFigureOut">
+            <a:fld id="{5A73DC13-68B4-4392-81B5-A9F927C5A546}" type="datetimeFigureOut">
               <a:rPr kumimoji="1" lang="ja-JP" altLang="en-US" smtClean="0"/>
               <a:t>2026/7/30</a:t>
             </a:fld>
@@ -2935,7 +2935,7 @@
           <p:cNvPr id="6" name="フッター プレースホルダー 5">
             <a:extLst>
               <a:ext uri="{FF2B5EF4-FFF2-40B4-BE49-F238E27FC236}">
-                <a16:creationId xmlns:a16="http://schemas.microsoft.com/office/drawing/2014/main" id="{9A804984-89DD-B08C-11CF-F19CC8D5779B}"/>
+                <a16:creationId xmlns:a16="http://schemas.microsoft.com/office/drawing/2014/main" id="{279FE0CA-35C2-1D84-FBCB-BD03446DF9B2}"/>
               </a:ext>
             </a:extLst>
           </p:cNvPr>
@@ -2960,7 +2960,7 @@
           <p:cNvPr id="7" name="スライド番号プレースホルダー 6">
             <a:extLst>
               <a:ext uri="{FF2B5EF4-FFF2-40B4-BE49-F238E27FC236}">
-                <a16:creationId xmlns:a16="http://schemas.microsoft.com/office/drawing/2014/main" id="{016C307D-8F58-011B-2610-4143AC75A5AF}"/>
+                <a16:creationId xmlns:a16="http://schemas.microsoft.com/office/drawing/2014/main" id="{E9440F01-B154-B87F-98D5-453BD58FFE42}"/>
               </a:ext>
             </a:extLst>
           </p:cNvPr>
@@ -2976,7 +2976,7 @@
           <a:bodyPr/>
           <a:lstStyle/>
           <a:p>
-            <a:fld id="{EB57A44D-E996-4793-A24D-44D77AE500BF}" type="slidenum">
+            <a:fld id="{0DA46A8A-CA94-4CC3-8097-27B51B6BF6DE}" type="slidenum">
               <a:rPr kumimoji="1" lang="ja-JP" altLang="en-US" smtClean="0"/>
               <a:t>‹#›</a:t>
             </a:fld>
@@ -2987,7 +2987,7 @@
     </p:spTree>
     <p:extLst>
       <p:ext uri="{BB962C8B-B14F-4D97-AF65-F5344CB8AC3E}">
-        <p14:creationId xmlns:p14="http://schemas.microsoft.com/office/powerpoint/2010/main" val="482868551"/>
+        <p14:creationId xmlns:p14="http://schemas.microsoft.com/office/powerpoint/2010/main" val="3357267376"/>
       </p:ext>
     </p:extLst>
   </p:cSld>
@@ -3024,7 +3024,7 @@
           <p:cNvPr id="2" name="タイトル プレースホルダー 1">
             <a:extLst>
               <a:ext uri="{FF2B5EF4-FFF2-40B4-BE49-F238E27FC236}">
-                <a16:creationId xmlns:a16="http://schemas.microsoft.com/office/drawing/2014/main" id="{74152443-671C-E646-2F56-A7D010B6FA53}"/>
+                <a16:creationId xmlns:a16="http://schemas.microsoft.com/office/drawing/2014/main" id="{B83200AC-DD30-2C27-0F2C-498C992A1E55}"/>
               </a:ext>
             </a:extLst>
           </p:cNvPr>
@@ -3062,7 +3062,7 @@
           <p:cNvPr id="3" name="テキスト プレースホルダー 2">
             <a:extLst>
               <a:ext uri="{FF2B5EF4-FFF2-40B4-BE49-F238E27FC236}">
-                <a16:creationId xmlns:a16="http://schemas.microsoft.com/office/drawing/2014/main" id="{3ED56789-4B8F-2028-BAB4-D73DF8FC31A8}"/>
+                <a16:creationId xmlns:a16="http://schemas.microsoft.com/office/drawing/2014/main" id="{77921D94-A27F-9F41-2F17-B8447FEF2180}"/>
               </a:ext>
             </a:extLst>
           </p:cNvPr>
@@ -3161,7 +3161,7 @@
           <p:cNvPr id="4" name="日付プレースホルダー 3">
             <a:extLst>
               <a:ext uri="{FF2B5EF4-FFF2-40B4-BE49-F238E27FC236}">
-                <a16:creationId xmlns:a16="http://schemas.microsoft.com/office/drawing/2014/main" id="{7C9E9944-9CA0-895D-52BF-5CB2198BC2E1}"/>
+                <a16:creationId xmlns:a16="http://schemas.microsoft.com/office/drawing/2014/main" id="{B86A4C14-33F4-AA90-2E30-7035F5363D6C}"/>
               </a:ext>
             </a:extLst>
           </p:cNvPr>
@@ -3195,7 +3195,7 @@
             </a:lvl1pPr>
           </a:lstStyle>
           <a:p>
-            <a:fld id="{E020A80F-0EF2-464F-B51E-5ED015D5F829}" type="datetimeFigureOut">
+            <a:fld id="{5A73DC13-68B4-4392-81B5-A9F927C5A546}" type="datetimeFigureOut">
               <a:rPr kumimoji="1" lang="ja-JP" altLang="en-US" smtClean="0"/>
               <a:t>2026/7/30</a:t>
             </a:fld>
@@ -3208,7 +3208,7 @@
           <p:cNvPr id="5" name="フッター プレースホルダー 4">
             <a:extLst>
               <a:ext uri="{FF2B5EF4-FFF2-40B4-BE49-F238E27FC236}">
-                <a16:creationId xmlns:a16="http://schemas.microsoft.com/office/drawing/2014/main" id="{790112AB-FF90-81CE-65D0-1B72F3EC03D7}"/>
+                <a16:creationId xmlns:a16="http://schemas.microsoft.com/office/drawing/2014/main" id="{7E69DF06-B92D-46CD-08F3-969B850F2B17}"/>
               </a:ext>
             </a:extLst>
           </p:cNvPr>
@@ -3251,7 +3251,7 @@
           <p:cNvPr id="6" name="スライド番号プレースホルダー 5">
             <a:extLst>
               <a:ext uri="{FF2B5EF4-FFF2-40B4-BE49-F238E27FC236}">
-                <a16:creationId xmlns:a16="http://schemas.microsoft.com/office/drawing/2014/main" id="{761EC924-AAB0-1BAE-7B8C-90D1FE993BD3}"/>
+                <a16:creationId xmlns:a16="http://schemas.microsoft.com/office/drawing/2014/main" id="{2C3B324F-0D36-6B3B-B492-1A0CBC73ACA1}"/>
               </a:ext>
             </a:extLst>
           </p:cNvPr>
@@ -3285,7 +3285,7 @@
             </a:lvl1pPr>
           </a:lstStyle>
           <a:p>
-            <a:fld id="{EB57A44D-E996-4793-A24D-44D77AE500BF}" type="slidenum">
+            <a:fld id="{0DA46A8A-CA94-4CC3-8097-27B51B6BF6DE}" type="slidenum">
               <a:rPr kumimoji="1" lang="ja-JP" altLang="en-US" smtClean="0"/>
               <a:t>‹#›</a:t>
             </a:fld>
@@ -3296,7 +3296,7 @@
     </p:spTree>
     <p:extLst>
       <p:ext uri="{BB962C8B-B14F-4D97-AF65-F5344CB8AC3E}">
-        <p14:creationId xmlns:p14="http://schemas.microsoft.com/office/powerpoint/2010/main" val="50624331"/>
+        <p14:creationId xmlns:p14="http://schemas.microsoft.com/office/powerpoint/2010/main" val="3605751975"/>
       </p:ext>
     </p:extLst>
   </p:cSld>
@@ -3619,7 +3619,7 @@
           <p:cNvPr id="2" name="テキスト ボックス 1">
             <a:extLst>
               <a:ext uri="{FF2B5EF4-FFF2-40B4-BE49-F238E27FC236}">
-                <a16:creationId xmlns:a16="http://schemas.microsoft.com/office/drawing/2014/main" id="{5F90574E-7FAA-D3F7-0D42-648CE39A2095}"/>
+                <a16:creationId xmlns:a16="http://schemas.microsoft.com/office/drawing/2014/main" id="{5F271A0C-276D-B77E-0040-CC0BE4F8A2B0}"/>
               </a:ext>
             </a:extLst>
           </p:cNvPr>
@@ -3665,7 +3665,7 @@
           <p:cNvPr id="3" name="テキスト ボックス 2">
             <a:extLst>
               <a:ext uri="{FF2B5EF4-FFF2-40B4-BE49-F238E27FC236}">
-                <a16:creationId xmlns:a16="http://schemas.microsoft.com/office/drawing/2014/main" id="{FD48A695-4027-C135-4ED7-7B9E7054CE7B}"/>
+                <a16:creationId xmlns:a16="http://schemas.microsoft.com/office/drawing/2014/main" id="{D559E040-6DB9-CF62-BFCC-D100996E9799}"/>
               </a:ext>
             </a:extLst>
           </p:cNvPr>
@@ -3695,14 +3695,17 @@
                 </a:solidFill>
                 <a:latin typeface="Arial" panose="020B0604020202020204" pitchFamily="34" charset="0"/>
               </a:rPr>
-              <a:t>dqwalk-mukatoshin TECH EXPLANATION</a:t>
-            </a:r>
-            <a:endParaRPr kumimoji="1" lang="ja-JP" altLang="en-US" sz="3400" b="1">
-              <a:solidFill>
-                <a:srgbClr val="111111"/>
-              </a:solidFill>
-              <a:latin typeface="Arial" panose="020B0604020202020204" pitchFamily="34" charset="0"/>
-            </a:endParaRPr>
+              <a:t>Dqwalk Mukatoshin</a:t>
+            </a:r>
+            <a:r>
+              <a:rPr kumimoji="1" lang="ja-JP" altLang="en-US" sz="3400" b="1">
+                <a:solidFill>
+                  <a:srgbClr val="111111"/>
+                </a:solidFill>
+                <a:latin typeface="Arial" panose="020B0604020202020204" pitchFamily="34" charset="0"/>
+              </a:rPr>
+              <a:t>の技術解説</a:t>
+            </a:r>
           </a:p>
         </p:txBody>
       </p:sp>
@@ -3711,7 +3714,7 @@
           <p:cNvPr id="4" name="テキスト ボックス 3">
             <a:extLst>
               <a:ext uri="{FF2B5EF4-FFF2-40B4-BE49-F238E27FC236}">
-                <a16:creationId xmlns:a16="http://schemas.microsoft.com/office/drawing/2014/main" id="{BBFD56F9-C41B-F3E1-D5A1-7E902B037852}"/>
+                <a16:creationId xmlns:a16="http://schemas.microsoft.com/office/drawing/2014/main" id="{0520A25D-DD05-5D7F-B17E-DCDC0432DC2F}"/>
               </a:ext>
             </a:extLst>
           </p:cNvPr>
@@ -3735,20 +3738,14 @@
           <a:lstStyle/>
           <a:p>
             <a:r>
-              <a:rPr kumimoji="1" lang="en-US" altLang="ja-JP" sz="2000">
+              <a:rPr kumimoji="1" lang="ja-JP" altLang="en-US" sz="2000">
                 <a:solidFill>
                   <a:srgbClr val="333333"/>
                 </a:solidFill>
                 <a:latin typeface="Arial" panose="020B0604020202020204" pitchFamily="34" charset="0"/>
               </a:rPr>
-              <a:t>Architecture, implementation and commit history in 75 seconds</a:t>
-            </a:r>
-            <a:endParaRPr kumimoji="1" lang="ja-JP" altLang="en-US" sz="2000">
-              <a:solidFill>
-                <a:srgbClr val="333333"/>
-              </a:solidFill>
-              <a:latin typeface="Arial" panose="020B0604020202020204" pitchFamily="34" charset="0"/>
-            </a:endParaRPr>
+              <a:t>設計・実装・コミットから学ぶ短時間プレビュー</a:t>
+            </a:r>
           </a:p>
         </p:txBody>
       </p:sp>
@@ -3757,7 +3754,7 @@
           <p:cNvPr id="5" name="テキスト ボックス 4">
             <a:extLst>
               <a:ext uri="{FF2B5EF4-FFF2-40B4-BE49-F238E27FC236}">
-                <a16:creationId xmlns:a16="http://schemas.microsoft.com/office/drawing/2014/main" id="{93FC33E0-8CD5-29B9-27FB-11C1651C55D4}"/>
+                <a16:creationId xmlns:a16="http://schemas.microsoft.com/office/drawing/2014/main" id="{665FBC2D-E8A3-93EC-BF39-BCD8D481A8EA}"/>
               </a:ext>
             </a:extLst>
           </p:cNvPr>
@@ -3804,7 +3801,7 @@
             <a:hlinkClick r:id="" action="ppaction://media"/>
             <a:extLst>
               <a:ext uri="{FF2B5EF4-FFF2-40B4-BE49-F238E27FC236}">
-                <a16:creationId xmlns:a16="http://schemas.microsoft.com/office/drawing/2014/main" id="{F05DD792-6BB3-FD98-14D6-AC377AA7609F}"/>
+                <a16:creationId xmlns:a16="http://schemas.microsoft.com/office/drawing/2014/main" id="{28BD7612-443D-9DC0-C12D-D2938869BBF4}"/>
               </a:ext>
             </a:extLst>
           </p:cNvPr>
@@ -3839,7 +3836,7 @@
     </p:spTree>
     <p:extLst>
       <p:ext uri="{BB962C8B-B14F-4D97-AF65-F5344CB8AC3E}">
-        <p14:creationId xmlns:p14="http://schemas.microsoft.com/office/powerpoint/2010/main" val="2124432204"/>
+        <p14:creationId xmlns:p14="http://schemas.microsoft.com/office/powerpoint/2010/main" val="1944866285"/>
       </p:ext>
     </p:extLst>
   </p:cSld>
@@ -3963,7 +3960,7 @@
           <p:cNvPr id="2" name="テキスト ボックス 1">
             <a:extLst>
               <a:ext uri="{FF2B5EF4-FFF2-40B4-BE49-F238E27FC236}">
-                <a16:creationId xmlns:a16="http://schemas.microsoft.com/office/drawing/2014/main" id="{C52CEE62-F1B6-3E8B-1334-0F267E5CB3F7}"/>
+                <a16:creationId xmlns:a16="http://schemas.microsoft.com/office/drawing/2014/main" id="{48B62BA2-3D5C-D879-7A3E-BA9B2AE0F33F}"/>
               </a:ext>
             </a:extLst>
           </p:cNvPr>
@@ -4009,7 +4006,7 @@
           <p:cNvPr id="3" name="テキスト ボックス 2">
             <a:extLst>
               <a:ext uri="{FF2B5EF4-FFF2-40B4-BE49-F238E27FC236}">
-                <a16:creationId xmlns:a16="http://schemas.microsoft.com/office/drawing/2014/main" id="{C3148623-C226-CAB9-FBBD-6E5687CDED85}"/>
+                <a16:creationId xmlns:a16="http://schemas.microsoft.com/office/drawing/2014/main" id="{9506BCAE-586D-B891-4120-0C1FF2A55146}"/>
               </a:ext>
             </a:extLst>
           </p:cNvPr>
@@ -4033,20 +4030,14 @@
           <a:lstStyle/>
           <a:p>
             <a:r>
-              <a:rPr kumimoji="1" lang="en-US" altLang="ja-JP" sz="3400" b="1">
+              <a:rPr kumimoji="1" lang="ja-JP" altLang="en-US" sz="3400" b="1">
                 <a:solidFill>
                   <a:srgbClr val="111111"/>
                 </a:solidFill>
                 <a:latin typeface="Arial" panose="020B0604020202020204" pitchFamily="34" charset="0"/>
               </a:rPr>
-              <a:t>WHAT DOES IT SOLVE?</a:t>
-            </a:r>
-            <a:endParaRPr kumimoji="1" lang="ja-JP" altLang="en-US" sz="3400" b="1">
-              <a:solidFill>
-                <a:srgbClr val="111111"/>
-              </a:solidFill>
-              <a:latin typeface="Arial" panose="020B0604020202020204" pitchFamily="34" charset="0"/>
-            </a:endParaRPr>
+              <a:t>このプロジェクトは何を解決する？</a:t>
+            </a:r>
           </a:p>
         </p:txBody>
       </p:sp>
@@ -4055,7 +4046,7 @@
           <p:cNvPr id="4" name="テキスト ボックス 3">
             <a:extLst>
               <a:ext uri="{FF2B5EF4-FFF2-40B4-BE49-F238E27FC236}">
-                <a16:creationId xmlns:a16="http://schemas.microsoft.com/office/drawing/2014/main" id="{694D4C1E-C917-8CB3-3699-5C2AA729C8E5}"/>
+                <a16:creationId xmlns:a16="http://schemas.microsoft.com/office/drawing/2014/main" id="{D3F5BA82-125B-412A-C6E9-F0185B97EC15}"/>
               </a:ext>
             </a:extLst>
           </p:cNvPr>
@@ -4101,7 +4092,7 @@
           <p:cNvPr id="5" name="テキスト ボックス 4">
             <a:extLst>
               <a:ext uri="{FF2B5EF4-FFF2-40B4-BE49-F238E27FC236}">
-                <a16:creationId xmlns:a16="http://schemas.microsoft.com/office/drawing/2014/main" id="{704EF0FF-2376-D350-1E70-C9A370322EE9}"/>
+                <a16:creationId xmlns:a16="http://schemas.microsoft.com/office/drawing/2014/main" id="{D322636A-13EF-8FB3-ADFC-A4037E063529}"/>
               </a:ext>
             </a:extLst>
           </p:cNvPr>
@@ -4148,7 +4139,7 @@
             <a:hlinkClick r:id="" action="ppaction://media"/>
             <a:extLst>
               <a:ext uri="{FF2B5EF4-FFF2-40B4-BE49-F238E27FC236}">
-                <a16:creationId xmlns:a16="http://schemas.microsoft.com/office/drawing/2014/main" id="{154E9E27-2338-4190-1A3A-F8C5BBBCA02E}"/>
+                <a16:creationId xmlns:a16="http://schemas.microsoft.com/office/drawing/2014/main" id="{CDDB2F51-9831-0813-593C-492967FFE3AF}"/>
               </a:ext>
             </a:extLst>
           </p:cNvPr>
@@ -4183,7 +4174,7 @@
     </p:spTree>
     <p:extLst>
       <p:ext uri="{BB962C8B-B14F-4D97-AF65-F5344CB8AC3E}">
-        <p14:creationId xmlns:p14="http://schemas.microsoft.com/office/powerpoint/2010/main" val="4105113040"/>
+        <p14:creationId xmlns:p14="http://schemas.microsoft.com/office/powerpoint/2010/main" val="2702866337"/>
       </p:ext>
     </p:extLst>
   </p:cSld>
@@ -4307,7 +4298,7 @@
           <p:cNvPr id="2" name="テキスト ボックス 1">
             <a:extLst>
               <a:ext uri="{FF2B5EF4-FFF2-40B4-BE49-F238E27FC236}">
-                <a16:creationId xmlns:a16="http://schemas.microsoft.com/office/drawing/2014/main" id="{EE1D2E96-F6CF-9950-138C-FCB3AB7CF02C}"/>
+                <a16:creationId xmlns:a16="http://schemas.microsoft.com/office/drawing/2014/main" id="{F3287D37-1071-091E-DD8F-451C71D67EE1}"/>
               </a:ext>
             </a:extLst>
           </p:cNvPr>
@@ -4353,7 +4344,7 @@
           <p:cNvPr id="3" name="テキスト ボックス 2">
             <a:extLst>
               <a:ext uri="{FF2B5EF4-FFF2-40B4-BE49-F238E27FC236}">
-                <a16:creationId xmlns:a16="http://schemas.microsoft.com/office/drawing/2014/main" id="{97DF5181-CEC3-9E49-3AB3-06EF67E1ED7D}"/>
+                <a16:creationId xmlns:a16="http://schemas.microsoft.com/office/drawing/2014/main" id="{07F700A6-25E6-392B-EAF0-E293E10FF360}"/>
               </a:ext>
             </a:extLst>
           </p:cNvPr>
@@ -4377,20 +4368,14 @@
           <a:lstStyle/>
           <a:p>
             <a:r>
-              <a:rPr kumimoji="1" lang="en-US" altLang="ja-JP" sz="3400" b="1">
+              <a:rPr kumimoji="1" lang="ja-JP" altLang="en-US" sz="3400" b="1">
                 <a:solidFill>
                   <a:srgbClr val="111111"/>
                 </a:solidFill>
                 <a:latin typeface="Arial" panose="020B0604020202020204" pitchFamily="34" charset="0"/>
               </a:rPr>
-              <a:t>TECH STACK</a:t>
-            </a:r>
-            <a:endParaRPr kumimoji="1" lang="ja-JP" altLang="en-US" sz="3400" b="1">
-              <a:solidFill>
-                <a:srgbClr val="111111"/>
-              </a:solidFill>
-              <a:latin typeface="Arial" panose="020B0604020202020204" pitchFamily="34" charset="0"/>
-            </a:endParaRPr>
+              <a:t>技術スタック</a:t>
+            </a:r>
           </a:p>
         </p:txBody>
       </p:sp>
@@ -4399,7 +4384,7 @@
           <p:cNvPr id="4" name="テキスト ボックス 3">
             <a:extLst>
               <a:ext uri="{FF2B5EF4-FFF2-40B4-BE49-F238E27FC236}">
-                <a16:creationId xmlns:a16="http://schemas.microsoft.com/office/drawing/2014/main" id="{1EE446CE-3DD0-F787-A363-73D4D8217028}"/>
+                <a16:creationId xmlns:a16="http://schemas.microsoft.com/office/drawing/2014/main" id="{8AB15DF2-CEEB-5992-C93C-9E28AA432B33}"/>
               </a:ext>
             </a:extLst>
           </p:cNvPr>
@@ -4409,7 +4394,7 @@
         <p:spPr>
           <a:xfrm>
             <a:off x="533400" y="3429000"/>
-            <a:ext cx="10795000" cy="400110"/>
+            <a:ext cx="10795000" cy="707886"/>
           </a:xfrm>
           <a:prstGeom prst="rect">
             <a:avLst/>
@@ -4423,13 +4408,22 @@
           <a:lstStyle/>
           <a:p>
             <a:r>
+              <a:rPr kumimoji="1" lang="ja-JP" altLang="en-US" sz="2000">
+                <a:solidFill>
+                  <a:srgbClr val="333333"/>
+                </a:solidFill>
+                <a:latin typeface="Arial" panose="020B0604020202020204" pitchFamily="34" charset="0"/>
+              </a:rPr>
+              <a:t>主要技術：</a:t>
+            </a:r>
+            <a:r>
               <a:rPr kumimoji="1" lang="en-US" altLang="ja-JP" sz="2000">
                 <a:solidFill>
                   <a:srgbClr val="333333"/>
                 </a:solidFill>
                 <a:latin typeface="Arial" panose="020B0604020202020204" pitchFamily="34" charset="0"/>
               </a:rPr>
-              <a:t>Primary technologies: TypeScript</a:t>
+              <a:t>TypeScript</a:t>
             </a:r>
             <a:r>
               <a:rPr kumimoji="1" lang="ja-JP" altLang="en-US" sz="2000">
@@ -4465,14 +4459,18 @@
                 </a:solidFill>
                 <a:latin typeface="Arial" panose="020B0604020202020204" pitchFamily="34" charset="0"/>
               </a:rPr>
-              <a:t>CSS</a:t>
-            </a:r>
-            <a:endParaRPr kumimoji="1" lang="ja-JP" altLang="en-US" sz="2000">
-              <a:solidFill>
-                <a:srgbClr val="333333"/>
-              </a:solidFill>
-              <a:latin typeface="Arial" panose="020B0604020202020204" pitchFamily="34" charset="0"/>
-            </a:endParaRPr>
+              <a:t>CSS
+</a:t>
+            </a:r>
+            <a:r>
+              <a:rPr kumimoji="1" lang="ja-JP" altLang="en-US" sz="2000">
+                <a:solidFill>
+                  <a:srgbClr val="333333"/>
+                </a:solidFill>
+                <a:latin typeface="Arial" panose="020B0604020202020204" pitchFamily="34" charset="0"/>
+              </a:rPr>
+              <a:t>役割を分け、保守しやすい構成を目指しています。</a:t>
+            </a:r>
           </a:p>
         </p:txBody>
       </p:sp>
@@ -4481,7 +4479,7 @@
           <p:cNvPr id="5" name="テキスト ボックス 4">
             <a:extLst>
               <a:ext uri="{FF2B5EF4-FFF2-40B4-BE49-F238E27FC236}">
-                <a16:creationId xmlns:a16="http://schemas.microsoft.com/office/drawing/2014/main" id="{039D9D13-1281-7F4C-3F1B-4B8F2025B392}"/>
+                <a16:creationId xmlns:a16="http://schemas.microsoft.com/office/drawing/2014/main" id="{CC851319-2CEC-0DF3-2A4E-BAB1A6D320C2}"/>
               </a:ext>
             </a:extLst>
           </p:cNvPr>
@@ -4528,7 +4526,7 @@
             <a:hlinkClick r:id="" action="ppaction://media"/>
             <a:extLst>
               <a:ext uri="{FF2B5EF4-FFF2-40B4-BE49-F238E27FC236}">
-                <a16:creationId xmlns:a16="http://schemas.microsoft.com/office/drawing/2014/main" id="{F4C5D349-9A57-E538-10F0-556378F557BC}"/>
+                <a16:creationId xmlns:a16="http://schemas.microsoft.com/office/drawing/2014/main" id="{7CAF3A4F-DAE9-6B1B-664D-39C976E51097}"/>
               </a:ext>
             </a:extLst>
           </p:cNvPr>
@@ -4563,7 +4561,7 @@
     </p:spTree>
     <p:extLst>
       <p:ext uri="{BB962C8B-B14F-4D97-AF65-F5344CB8AC3E}">
-        <p14:creationId xmlns:p14="http://schemas.microsoft.com/office/powerpoint/2010/main" val="868722481"/>
+        <p14:creationId xmlns:p14="http://schemas.microsoft.com/office/powerpoint/2010/main" val="4210267479"/>
       </p:ext>
     </p:extLst>
   </p:cSld>
@@ -4687,7 +4685,7 @@
           <p:cNvPr id="2" name="テキスト ボックス 1">
             <a:extLst>
               <a:ext uri="{FF2B5EF4-FFF2-40B4-BE49-F238E27FC236}">
-                <a16:creationId xmlns:a16="http://schemas.microsoft.com/office/drawing/2014/main" id="{2B858E63-4CA4-B8AC-E21E-394C781D3861}"/>
+                <a16:creationId xmlns:a16="http://schemas.microsoft.com/office/drawing/2014/main" id="{DA285D23-07C6-768D-FDB8-052DE9FBA9F3}"/>
               </a:ext>
             </a:extLst>
           </p:cNvPr>
@@ -4733,7 +4731,7 @@
           <p:cNvPr id="3" name="テキスト ボックス 2">
             <a:extLst>
               <a:ext uri="{FF2B5EF4-FFF2-40B4-BE49-F238E27FC236}">
-                <a16:creationId xmlns:a16="http://schemas.microsoft.com/office/drawing/2014/main" id="{B83A5139-DF0D-BC1E-CF31-FD6A68E49AB1}"/>
+                <a16:creationId xmlns:a16="http://schemas.microsoft.com/office/drawing/2014/main" id="{E5CC5DB6-2793-72A9-FB34-82042B3788A0}"/>
               </a:ext>
             </a:extLst>
           </p:cNvPr>
@@ -4757,20 +4755,14 @@
           <a:lstStyle/>
           <a:p>
             <a:r>
-              <a:rPr kumimoji="1" lang="en-US" altLang="ja-JP" sz="3400" b="1">
+              <a:rPr kumimoji="1" lang="ja-JP" altLang="en-US" sz="3400" b="1">
                 <a:solidFill>
                   <a:srgbClr val="111111"/>
                 </a:solidFill>
                 <a:latin typeface="Arial" panose="020B0604020202020204" pitchFamily="34" charset="0"/>
               </a:rPr>
-              <a:t>REPOSITORY HIGHLIGHTS</a:t>
-            </a:r>
-            <a:endParaRPr kumimoji="1" lang="ja-JP" altLang="en-US" sz="3400" b="1">
-              <a:solidFill>
-                <a:srgbClr val="111111"/>
-              </a:solidFill>
-              <a:latin typeface="Arial" panose="020B0604020202020204" pitchFamily="34" charset="0"/>
-            </a:endParaRPr>
+              <a:t>リポジトリの読みどころ</a:t>
+            </a:r>
           </a:p>
         </p:txBody>
       </p:sp>
@@ -4779,7 +4771,7 @@
           <p:cNvPr id="4" name="テキスト ボックス 3">
             <a:extLst>
               <a:ext uri="{FF2B5EF4-FFF2-40B4-BE49-F238E27FC236}">
-                <a16:creationId xmlns:a16="http://schemas.microsoft.com/office/drawing/2014/main" id="{141E7082-DD34-10E0-49DD-79D4CADA3AA1}"/>
+                <a16:creationId xmlns:a16="http://schemas.microsoft.com/office/drawing/2014/main" id="{5D2C66FD-6449-6CE4-430F-8F6B67B560EA}"/>
               </a:ext>
             </a:extLst>
           </p:cNvPr>
@@ -4789,7 +4781,7 @@
         <p:spPr>
           <a:xfrm>
             <a:off x="533400" y="3429000"/>
-            <a:ext cx="10795000" cy="400110"/>
+            <a:ext cx="10795000" cy="707886"/>
           </a:xfrm>
           <a:prstGeom prst="rect">
             <a:avLst/>
@@ -4803,13 +4795,77 @@
           <a:lstStyle/>
           <a:p>
             <a:r>
+              <a:rPr kumimoji="1" lang="ja-JP" altLang="en-US" sz="2000">
+                <a:solidFill>
+                  <a:srgbClr val="333333"/>
+                </a:solidFill>
+                <a:latin typeface="Arial" panose="020B0604020202020204" pitchFamily="34" charset="0"/>
+              </a:rPr>
+              <a:t>公開コード、</a:t>
+            </a:r>
+            <a:r>
               <a:rPr kumimoji="1" lang="en-US" altLang="ja-JP" sz="2000">
                 <a:solidFill>
                   <a:srgbClr val="333333"/>
                 </a:solidFill>
                 <a:latin typeface="Arial" panose="020B0604020202020204" pitchFamily="34" charset="0"/>
               </a:rPr>
-              <a:t>Public source code, README and commit history reveal the design decisions.</a:t>
+              <a:t>README</a:t>
+            </a:r>
+            <a:r>
+              <a:rPr kumimoji="1" lang="ja-JP" altLang="en-US" sz="2000">
+                <a:solidFill>
+                  <a:srgbClr val="333333"/>
+                </a:solidFill>
+                <a:latin typeface="Arial" panose="020B0604020202020204" pitchFamily="34" charset="0"/>
+              </a:rPr>
+              <a:t>、コミット履歴から設計判断を確認できます。
+主なファイル：</a:t>
+            </a:r>
+            <a:r>
+              <a:rPr kumimoji="1" lang="en-US" altLang="ja-JP" sz="2000">
+                <a:solidFill>
+                  <a:srgbClr val="333333"/>
+                </a:solidFill>
+                <a:latin typeface="Arial" panose="020B0604020202020204" pitchFamily="34" charset="0"/>
+              </a:rPr>
+              <a:t>AGENTS.md</a:t>
+            </a:r>
+            <a:r>
+              <a:rPr kumimoji="1" lang="ja-JP" altLang="en-US" sz="2000">
+                <a:solidFill>
+                  <a:srgbClr val="333333"/>
+                </a:solidFill>
+                <a:latin typeface="Arial" panose="020B0604020202020204" pitchFamily="34" charset="0"/>
+              </a:rPr>
+              <a:t>、</a:t>
+            </a:r>
+            <a:r>
+              <a:rPr kumimoji="1" lang="en-US" altLang="ja-JP" sz="2000">
+                <a:solidFill>
+                  <a:srgbClr val="333333"/>
+                </a:solidFill>
+                <a:latin typeface="Arial" panose="020B0604020202020204" pitchFamily="34" charset="0"/>
+              </a:rPr>
+              <a:t>CLAUDE.md</a:t>
+            </a:r>
+            <a:r>
+              <a:rPr kumimoji="1" lang="ja-JP" altLang="en-US" sz="2000">
+                <a:solidFill>
+                  <a:srgbClr val="333333"/>
+                </a:solidFill>
+                <a:latin typeface="Arial" panose="020B0604020202020204" pitchFamily="34" charset="0"/>
+              </a:rPr>
+              <a:t>、</a:t>
+            </a:r>
+            <a:r>
+              <a:rPr kumimoji="1" lang="en-US" altLang="ja-JP" sz="2000">
+                <a:solidFill>
+                  <a:srgbClr val="333333"/>
+                </a:solidFill>
+                <a:latin typeface="Arial" panose="020B0604020202020204" pitchFamily="34" charset="0"/>
+              </a:rPr>
+              <a:t>README.md</a:t>
             </a:r>
             <a:endParaRPr kumimoji="1" lang="ja-JP" altLang="en-US" sz="2000">
               <a:solidFill>
@@ -4825,7 +4881,7 @@
           <p:cNvPr id="5" name="テキスト ボックス 4">
             <a:extLst>
               <a:ext uri="{FF2B5EF4-FFF2-40B4-BE49-F238E27FC236}">
-                <a16:creationId xmlns:a16="http://schemas.microsoft.com/office/drawing/2014/main" id="{0856151D-5700-AC7F-FADC-282154E362C6}"/>
+                <a16:creationId xmlns:a16="http://schemas.microsoft.com/office/drawing/2014/main" id="{F3A2F1CD-246A-B630-D5A7-0CD73B3D69F2}"/>
               </a:ext>
             </a:extLst>
           </p:cNvPr>
@@ -4872,7 +4928,7 @@
             <a:hlinkClick r:id="" action="ppaction://media"/>
             <a:extLst>
               <a:ext uri="{FF2B5EF4-FFF2-40B4-BE49-F238E27FC236}">
-                <a16:creationId xmlns:a16="http://schemas.microsoft.com/office/drawing/2014/main" id="{3268C992-B6D0-FA4A-D3BA-448E79D38926}"/>
+                <a16:creationId xmlns:a16="http://schemas.microsoft.com/office/drawing/2014/main" id="{088700C3-B094-E71E-A525-71BF22EE6E50}"/>
               </a:ext>
             </a:extLst>
           </p:cNvPr>
@@ -4907,7 +4963,7 @@
     </p:spTree>
     <p:extLst>
       <p:ext uri="{BB962C8B-B14F-4D97-AF65-F5344CB8AC3E}">
-        <p14:creationId xmlns:p14="http://schemas.microsoft.com/office/powerpoint/2010/main" val="2579967955"/>
+        <p14:creationId xmlns:p14="http://schemas.microsoft.com/office/powerpoint/2010/main" val="3310974557"/>
       </p:ext>
     </p:extLst>
   </p:cSld>
@@ -5031,7 +5087,7 @@
           <p:cNvPr id="2" name="テキスト ボックス 1">
             <a:extLst>
               <a:ext uri="{FF2B5EF4-FFF2-40B4-BE49-F238E27FC236}">
-                <a16:creationId xmlns:a16="http://schemas.microsoft.com/office/drawing/2014/main" id="{F1DE44FA-C995-C326-8F3E-ABF4F4108C39}"/>
+                <a16:creationId xmlns:a16="http://schemas.microsoft.com/office/drawing/2014/main" id="{F6AF1290-971B-B785-F86B-8FEDF5813DA2}"/>
               </a:ext>
             </a:extLst>
           </p:cNvPr>
@@ -5077,7 +5133,7 @@
           <p:cNvPr id="3" name="テキスト ボックス 2">
             <a:extLst>
               <a:ext uri="{FF2B5EF4-FFF2-40B4-BE49-F238E27FC236}">
-                <a16:creationId xmlns:a16="http://schemas.microsoft.com/office/drawing/2014/main" id="{FDC507C8-1FCD-0833-8D5A-321806E1D6B5}"/>
+                <a16:creationId xmlns:a16="http://schemas.microsoft.com/office/drawing/2014/main" id="{8E95EF91-90C9-E617-201C-690826176C25}"/>
               </a:ext>
             </a:extLst>
           </p:cNvPr>
@@ -5101,20 +5157,14 @@
           <a:lstStyle/>
           <a:p>
             <a:r>
-              <a:rPr kumimoji="1" lang="en-US" altLang="ja-JP" sz="3400" b="1">
+              <a:rPr kumimoji="1" lang="ja-JP" altLang="en-US" sz="3400" b="1">
                 <a:solidFill>
                   <a:srgbClr val="111111"/>
                 </a:solidFill>
                 <a:latin typeface="Arial" panose="020B0604020202020204" pitchFamily="34" charset="0"/>
               </a:rPr>
-              <a:t>ITERATIVE IMPROVEMENT</a:t>
-            </a:r>
-            <a:endParaRPr kumimoji="1" lang="ja-JP" altLang="en-US" sz="3400" b="1">
-              <a:solidFill>
-                <a:srgbClr val="111111"/>
-              </a:solidFill>
-              <a:latin typeface="Arial" panose="020B0604020202020204" pitchFamily="34" charset="0"/>
-            </a:endParaRPr>
+              <a:t>コミットから分かる改善</a:t>
+            </a:r>
           </a:p>
         </p:txBody>
       </p:sp>
@@ -5123,7 +5173,7 @@
           <p:cNvPr id="4" name="テキスト ボックス 3">
             <a:extLst>
               <a:ext uri="{FF2B5EF4-FFF2-40B4-BE49-F238E27FC236}">
-                <a16:creationId xmlns:a16="http://schemas.microsoft.com/office/drawing/2014/main" id="{A6CA8658-4B2D-E18B-1586-D2CE89306DE8}"/>
+                <a16:creationId xmlns:a16="http://schemas.microsoft.com/office/drawing/2014/main" id="{5DE1067F-7A8F-6417-90AA-B1452F070CBD}"/>
               </a:ext>
             </a:extLst>
           </p:cNvPr>
@@ -5153,7 +5203,7 @@
                 </a:solidFill>
                 <a:latin typeface="Arial" panose="020B0604020202020204" pitchFamily="34" charset="0"/>
               </a:rPr>
-              <a:t>Small commits continuously improve features, quality and release readiness.</a:t>
+              <a:t>Initial DQ Walk free-to-play / auto-battle composition guide</a:t>
             </a:r>
             <a:endParaRPr kumimoji="1" lang="ja-JP" altLang="en-US" sz="2000">
               <a:solidFill>
@@ -5169,7 +5219,7 @@
           <p:cNvPr id="5" name="テキスト ボックス 4">
             <a:extLst>
               <a:ext uri="{FF2B5EF4-FFF2-40B4-BE49-F238E27FC236}">
-                <a16:creationId xmlns:a16="http://schemas.microsoft.com/office/drawing/2014/main" id="{DF4B3948-8D34-030E-5340-D53A9D8FE58D}"/>
+                <a16:creationId xmlns:a16="http://schemas.microsoft.com/office/drawing/2014/main" id="{375FDC97-021B-29DB-6C33-78272C6540F2}"/>
               </a:ext>
             </a:extLst>
           </p:cNvPr>
@@ -5216,7 +5266,7 @@
             <a:hlinkClick r:id="" action="ppaction://media"/>
             <a:extLst>
               <a:ext uri="{FF2B5EF4-FFF2-40B4-BE49-F238E27FC236}">
-                <a16:creationId xmlns:a16="http://schemas.microsoft.com/office/drawing/2014/main" id="{167B4F55-D3C4-0621-5AA1-D4586397E5EB}"/>
+                <a16:creationId xmlns:a16="http://schemas.microsoft.com/office/drawing/2014/main" id="{AE268EE4-E7B1-3F55-B0C9-B758DED9ADB4}"/>
               </a:ext>
             </a:extLst>
           </p:cNvPr>
@@ -5251,7 +5301,7 @@
     </p:spTree>
     <p:extLst>
       <p:ext uri="{BB962C8B-B14F-4D97-AF65-F5344CB8AC3E}">
-        <p14:creationId xmlns:p14="http://schemas.microsoft.com/office/powerpoint/2010/main" val="3542064473"/>
+        <p14:creationId xmlns:p14="http://schemas.microsoft.com/office/powerpoint/2010/main" val="1276985580"/>
       </p:ext>
     </p:extLst>
   </p:cSld>
@@ -5375,7 +5425,7 @@
           <p:cNvPr id="2" name="テキスト ボックス 1">
             <a:extLst>
               <a:ext uri="{FF2B5EF4-FFF2-40B4-BE49-F238E27FC236}">
-                <a16:creationId xmlns:a16="http://schemas.microsoft.com/office/drawing/2014/main" id="{D4B60B8C-B57F-CCF0-C907-E0AF4236871B}"/>
+                <a16:creationId xmlns:a16="http://schemas.microsoft.com/office/drawing/2014/main" id="{50C86DDE-AA92-C49B-F61A-406BBBC58559}"/>
               </a:ext>
             </a:extLst>
           </p:cNvPr>
@@ -5421,7 +5471,7 @@
           <p:cNvPr id="3" name="テキスト ボックス 2">
             <a:extLst>
               <a:ext uri="{FF2B5EF4-FFF2-40B4-BE49-F238E27FC236}">
-                <a16:creationId xmlns:a16="http://schemas.microsoft.com/office/drawing/2014/main" id="{98AD6581-3603-4429-DCEF-B7F78C0E5604}"/>
+                <a16:creationId xmlns:a16="http://schemas.microsoft.com/office/drawing/2014/main" id="{78775E74-889D-069E-D2CD-ECD232093231}"/>
               </a:ext>
             </a:extLst>
           </p:cNvPr>
@@ -5445,20 +5495,14 @@
           <a:lstStyle/>
           <a:p>
             <a:r>
-              <a:rPr kumimoji="1" lang="en-US" altLang="ja-JP" sz="3400" b="1">
+              <a:rPr kumimoji="1" lang="ja-JP" altLang="en-US" sz="3400" b="1">
                 <a:solidFill>
                   <a:srgbClr val="111111"/>
                 </a:solidFill>
                 <a:latin typeface="Arial" panose="020B0604020202020204" pitchFamily="34" charset="0"/>
               </a:rPr>
-              <a:t>READ THE FULL ARTICLE</a:t>
-            </a:r>
-            <a:endParaRPr kumimoji="1" lang="ja-JP" altLang="en-US" sz="3400" b="1">
-              <a:solidFill>
-                <a:srgbClr val="111111"/>
-              </a:solidFill>
-              <a:latin typeface="Arial" panose="020B0604020202020204" pitchFamily="34" charset="0"/>
-            </a:endParaRPr>
+              <a:t>詳しくは積み上げログへ</a:t>
+            </a:r>
           </a:p>
         </p:txBody>
       </p:sp>
@@ -5467,7 +5511,7 @@
           <p:cNvPr id="4" name="テキスト ボックス 3">
             <a:extLst>
               <a:ext uri="{FF2B5EF4-FFF2-40B4-BE49-F238E27FC236}">
-                <a16:creationId xmlns:a16="http://schemas.microsoft.com/office/drawing/2014/main" id="{BE07DA6C-CF3E-79F4-97F2-A819BD628D9E}"/>
+                <a16:creationId xmlns:a16="http://schemas.microsoft.com/office/drawing/2014/main" id="{0AEE8166-1FEF-5AC2-8E16-1B6E64E54F1F}"/>
               </a:ext>
             </a:extLst>
           </p:cNvPr>
@@ -5491,14 +5535,32 @@
           <a:lstStyle/>
           <a:p>
             <a:r>
-              <a:rPr kumimoji="1" lang="sv-SE" altLang="ja-JP" sz="2000">
+              <a:rPr kumimoji="1" lang="zh-TW" altLang="en-US" sz="2000">
+                <a:solidFill>
+                  <a:srgbClr val="333333"/>
+                </a:solidFill>
+                <a:latin typeface="Arial" panose="020B0604020202020204" pitchFamily="34" charset="0"/>
+              </a:rPr>
+              <a:t>記事： </a:t>
+            </a:r>
+            <a:r>
+              <a:rPr kumimoji="1" lang="en-US" altLang="zh-TW" sz="2000">
                 <a:solidFill>
                   <a:srgbClr val="333333"/>
                 </a:solidFill>
                 <a:latin typeface="Arial" panose="020B0604020202020204" pitchFamily="34" charset="0"/>
               </a:rPr>
               <a:t>https://syunnjack.dev/articles/dqwalk-mukatoshin
-TSUMIAGE LOG</a:t>
+</a:t>
+            </a:r>
+            <a:r>
+              <a:rPr kumimoji="1" lang="zh-TW" altLang="en-US" sz="2000">
+                <a:solidFill>
+                  <a:srgbClr val="333333"/>
+                </a:solidFill>
+                <a:latin typeface="Arial" panose="020B0604020202020204" pitchFamily="34" charset="0"/>
+              </a:rPr>
+              <a:t>学び、作り、振り返る開発記録。</a:t>
             </a:r>
             <a:endParaRPr kumimoji="1" lang="ja-JP" altLang="en-US" sz="2000">
               <a:solidFill>
@@ -5514,7 +5576,7 @@
           <p:cNvPr id="5" name="テキスト ボックス 4">
             <a:extLst>
               <a:ext uri="{FF2B5EF4-FFF2-40B4-BE49-F238E27FC236}">
-                <a16:creationId xmlns:a16="http://schemas.microsoft.com/office/drawing/2014/main" id="{CF627FEB-E997-BED0-6EE3-04E1B541E6C3}"/>
+                <a16:creationId xmlns:a16="http://schemas.microsoft.com/office/drawing/2014/main" id="{2DA4C0FE-80E4-BBB8-8B52-04D1224E5270}"/>
               </a:ext>
             </a:extLst>
           </p:cNvPr>
@@ -5561,7 +5623,7 @@
             <a:hlinkClick r:id="" action="ppaction://media"/>
             <a:extLst>
               <a:ext uri="{FF2B5EF4-FFF2-40B4-BE49-F238E27FC236}">
-                <a16:creationId xmlns:a16="http://schemas.microsoft.com/office/drawing/2014/main" id="{2FDC7235-EC83-3919-2900-2144C3DE7145}"/>
+                <a16:creationId xmlns:a16="http://schemas.microsoft.com/office/drawing/2014/main" id="{C1514FCA-F4F1-F8DF-F846-F2066EA6F974}"/>
               </a:ext>
             </a:extLst>
           </p:cNvPr>
@@ -5596,7 +5658,7 @@
     </p:spTree>
     <p:extLst>
       <p:ext uri="{BB962C8B-B14F-4D97-AF65-F5344CB8AC3E}">
-        <p14:creationId xmlns:p14="http://schemas.microsoft.com/office/powerpoint/2010/main" val="3687850173"/>
+        <p14:creationId xmlns:p14="http://schemas.microsoft.com/office/powerpoint/2010/main" val="837193100"/>
       </p:ext>
     </p:extLst>
   </p:cSld>

--- a/public/videos/repositories/dqwalk-mukatoshin/dqwalk-mukatoshin-tech-preview.pptx
+++ b/public/videos/repositories/dqwalk-mukatoshin/dqwalk-mukatoshin-tech-preview.pptx
@@ -134,7 +134,7 @@
           <p:cNvPr id="2" name="タイトル 1">
             <a:extLst>
               <a:ext uri="{FF2B5EF4-FFF2-40B4-BE49-F238E27FC236}">
-                <a16:creationId xmlns:a16="http://schemas.microsoft.com/office/drawing/2014/main" id="{CA016839-3988-4AF3-B8A6-0CCBD405DC60}"/>
+                <a16:creationId xmlns:a16="http://schemas.microsoft.com/office/drawing/2014/main" id="{D49AEA90-D649-69C5-BA44-E242C9DF4B73}"/>
               </a:ext>
             </a:extLst>
           </p:cNvPr>
@@ -171,7 +171,7 @@
           <p:cNvPr id="3" name="字幕 2">
             <a:extLst>
               <a:ext uri="{FF2B5EF4-FFF2-40B4-BE49-F238E27FC236}">
-                <a16:creationId xmlns:a16="http://schemas.microsoft.com/office/drawing/2014/main" id="{12E7225D-AF84-2582-10B6-7CEE67F6EFDA}"/>
+                <a16:creationId xmlns:a16="http://schemas.microsoft.com/office/drawing/2014/main" id="{B12D0111-7574-F3A5-29F8-F00175A72493}"/>
               </a:ext>
             </a:extLst>
           </p:cNvPr>
@@ -241,7 +241,7 @@
           <p:cNvPr id="4" name="日付プレースホルダー 3">
             <a:extLst>
               <a:ext uri="{FF2B5EF4-FFF2-40B4-BE49-F238E27FC236}">
-                <a16:creationId xmlns:a16="http://schemas.microsoft.com/office/drawing/2014/main" id="{98BB1475-B6C6-1CB8-E6B3-2F955B05DCB6}"/>
+                <a16:creationId xmlns:a16="http://schemas.microsoft.com/office/drawing/2014/main" id="{48F4C404-19A1-AE9D-8A9E-BD945A028F33}"/>
               </a:ext>
             </a:extLst>
           </p:cNvPr>
@@ -257,7 +257,7 @@
           <a:bodyPr/>
           <a:lstStyle/>
           <a:p>
-            <a:fld id="{5A73DC13-68B4-4392-81B5-A9F927C5A546}" type="datetimeFigureOut">
+            <a:fld id="{D472902D-9FDD-4526-874D-273E2F4F275C}" type="datetimeFigureOut">
               <a:rPr kumimoji="1" lang="ja-JP" altLang="en-US" smtClean="0"/>
               <a:t>2026/7/30</a:t>
             </a:fld>
@@ -270,7 +270,7 @@
           <p:cNvPr id="5" name="フッター プレースホルダー 4">
             <a:extLst>
               <a:ext uri="{FF2B5EF4-FFF2-40B4-BE49-F238E27FC236}">
-                <a16:creationId xmlns:a16="http://schemas.microsoft.com/office/drawing/2014/main" id="{8BFDB56D-BF93-CB90-01B5-C0FED12FF7B0}"/>
+                <a16:creationId xmlns:a16="http://schemas.microsoft.com/office/drawing/2014/main" id="{1E7D6522-914E-28FE-1E51-D2E70B147DDA}"/>
               </a:ext>
             </a:extLst>
           </p:cNvPr>
@@ -295,7 +295,7 @@
           <p:cNvPr id="6" name="スライド番号プレースホルダー 5">
             <a:extLst>
               <a:ext uri="{FF2B5EF4-FFF2-40B4-BE49-F238E27FC236}">
-                <a16:creationId xmlns:a16="http://schemas.microsoft.com/office/drawing/2014/main" id="{6DDA0A35-7B20-A298-6AB3-AFD43E01D81F}"/>
+                <a16:creationId xmlns:a16="http://schemas.microsoft.com/office/drawing/2014/main" id="{E78A47C4-E826-5A68-C445-BFD0BAA40D7D}"/>
               </a:ext>
             </a:extLst>
           </p:cNvPr>
@@ -311,7 +311,7 @@
           <a:bodyPr/>
           <a:lstStyle/>
           <a:p>
-            <a:fld id="{0DA46A8A-CA94-4CC3-8097-27B51B6BF6DE}" type="slidenum">
+            <a:fld id="{AFAA110A-7128-4036-BEAF-CEACF5B4B647}" type="slidenum">
               <a:rPr kumimoji="1" lang="ja-JP" altLang="en-US" smtClean="0"/>
               <a:t>‹#›</a:t>
             </a:fld>
@@ -322,7 +322,7 @@
     </p:spTree>
     <p:extLst>
       <p:ext uri="{BB962C8B-B14F-4D97-AF65-F5344CB8AC3E}">
-        <p14:creationId xmlns:p14="http://schemas.microsoft.com/office/powerpoint/2010/main" val="1513777639"/>
+        <p14:creationId xmlns:p14="http://schemas.microsoft.com/office/powerpoint/2010/main" val="700907500"/>
       </p:ext>
     </p:extLst>
   </p:cSld>
@@ -354,7 +354,7 @@
           <p:cNvPr id="2" name="タイトル 1">
             <a:extLst>
               <a:ext uri="{FF2B5EF4-FFF2-40B4-BE49-F238E27FC236}">
-                <a16:creationId xmlns:a16="http://schemas.microsoft.com/office/drawing/2014/main" id="{EF0A7994-DB08-EE93-9DCD-64BD71D0F084}"/>
+                <a16:creationId xmlns:a16="http://schemas.microsoft.com/office/drawing/2014/main" id="{73DB975B-A51B-B8D9-4D5D-5E3E31826626}"/>
               </a:ext>
             </a:extLst>
           </p:cNvPr>
@@ -382,7 +382,7 @@
           <p:cNvPr id="3" name="縦書きテキスト プレースホルダー 2">
             <a:extLst>
               <a:ext uri="{FF2B5EF4-FFF2-40B4-BE49-F238E27FC236}">
-                <a16:creationId xmlns:a16="http://schemas.microsoft.com/office/drawing/2014/main" id="{21739991-1987-B92E-1589-701CB8203B34}"/>
+                <a16:creationId xmlns:a16="http://schemas.microsoft.com/office/drawing/2014/main" id="{612E1647-CEBE-DA0F-029F-49EA44E6BF1E}"/>
               </a:ext>
             </a:extLst>
           </p:cNvPr>
@@ -471,7 +471,7 @@
           <p:cNvPr id="4" name="日付プレースホルダー 3">
             <a:extLst>
               <a:ext uri="{FF2B5EF4-FFF2-40B4-BE49-F238E27FC236}">
-                <a16:creationId xmlns:a16="http://schemas.microsoft.com/office/drawing/2014/main" id="{3113DDEB-6D7F-472A-2FCA-175A4564F6CE}"/>
+                <a16:creationId xmlns:a16="http://schemas.microsoft.com/office/drawing/2014/main" id="{4A9A5EA0-E1D2-71C6-8F6A-44E921BEDAC9}"/>
               </a:ext>
             </a:extLst>
           </p:cNvPr>
@@ -487,7 +487,7 @@
           <a:bodyPr/>
           <a:lstStyle/>
           <a:p>
-            <a:fld id="{5A73DC13-68B4-4392-81B5-A9F927C5A546}" type="datetimeFigureOut">
+            <a:fld id="{D472902D-9FDD-4526-874D-273E2F4F275C}" type="datetimeFigureOut">
               <a:rPr kumimoji="1" lang="ja-JP" altLang="en-US" smtClean="0"/>
               <a:t>2026/7/30</a:t>
             </a:fld>
@@ -500,7 +500,7 @@
           <p:cNvPr id="5" name="フッター プレースホルダー 4">
             <a:extLst>
               <a:ext uri="{FF2B5EF4-FFF2-40B4-BE49-F238E27FC236}">
-                <a16:creationId xmlns:a16="http://schemas.microsoft.com/office/drawing/2014/main" id="{C841A20A-E9C3-9C3F-DF54-01C2533A155A}"/>
+                <a16:creationId xmlns:a16="http://schemas.microsoft.com/office/drawing/2014/main" id="{2C221879-BB20-9C9F-6E9A-429D3B99BB8E}"/>
               </a:ext>
             </a:extLst>
           </p:cNvPr>
@@ -525,7 +525,7 @@
           <p:cNvPr id="6" name="スライド番号プレースホルダー 5">
             <a:extLst>
               <a:ext uri="{FF2B5EF4-FFF2-40B4-BE49-F238E27FC236}">
-                <a16:creationId xmlns:a16="http://schemas.microsoft.com/office/drawing/2014/main" id="{CA0AD36A-5343-61F6-97A4-9E6C0B27DB4C}"/>
+                <a16:creationId xmlns:a16="http://schemas.microsoft.com/office/drawing/2014/main" id="{47A175F8-A627-1DCA-E89E-43BFF078976E}"/>
               </a:ext>
             </a:extLst>
           </p:cNvPr>
@@ -541,7 +541,7 @@
           <a:bodyPr/>
           <a:lstStyle/>
           <a:p>
-            <a:fld id="{0DA46A8A-CA94-4CC3-8097-27B51B6BF6DE}" type="slidenum">
+            <a:fld id="{AFAA110A-7128-4036-BEAF-CEACF5B4B647}" type="slidenum">
               <a:rPr kumimoji="1" lang="ja-JP" altLang="en-US" smtClean="0"/>
               <a:t>‹#›</a:t>
             </a:fld>
@@ -552,7 +552,7 @@
     </p:spTree>
     <p:extLst>
       <p:ext uri="{BB962C8B-B14F-4D97-AF65-F5344CB8AC3E}">
-        <p14:creationId xmlns:p14="http://schemas.microsoft.com/office/powerpoint/2010/main" val="2378293712"/>
+        <p14:creationId xmlns:p14="http://schemas.microsoft.com/office/powerpoint/2010/main" val="1773931427"/>
       </p:ext>
     </p:extLst>
   </p:cSld>
@@ -584,7 +584,7 @@
           <p:cNvPr id="2" name="縦書きタイトル 1">
             <a:extLst>
               <a:ext uri="{FF2B5EF4-FFF2-40B4-BE49-F238E27FC236}">
-                <a16:creationId xmlns:a16="http://schemas.microsoft.com/office/drawing/2014/main" id="{3F9BE65A-0718-11EF-ECDF-5D40EADC561D}"/>
+                <a16:creationId xmlns:a16="http://schemas.microsoft.com/office/drawing/2014/main" id="{A736366B-5DE2-D41A-60F7-A697CECE3357}"/>
               </a:ext>
             </a:extLst>
           </p:cNvPr>
@@ -617,7 +617,7 @@
           <p:cNvPr id="3" name="縦書きテキスト プレースホルダー 2">
             <a:extLst>
               <a:ext uri="{FF2B5EF4-FFF2-40B4-BE49-F238E27FC236}">
-                <a16:creationId xmlns:a16="http://schemas.microsoft.com/office/drawing/2014/main" id="{F63477DA-4CCC-A24E-D8A3-C1828A463370}"/>
+                <a16:creationId xmlns:a16="http://schemas.microsoft.com/office/drawing/2014/main" id="{C036F5B4-5CEC-73C4-8E56-32B0EC9F6835}"/>
               </a:ext>
             </a:extLst>
           </p:cNvPr>
@@ -711,7 +711,7 @@
           <p:cNvPr id="4" name="日付プレースホルダー 3">
             <a:extLst>
               <a:ext uri="{FF2B5EF4-FFF2-40B4-BE49-F238E27FC236}">
-                <a16:creationId xmlns:a16="http://schemas.microsoft.com/office/drawing/2014/main" id="{AAB9BAAA-FCFD-EF6A-8795-2927DD8625BA}"/>
+                <a16:creationId xmlns:a16="http://schemas.microsoft.com/office/drawing/2014/main" id="{D2E5EC32-4C55-AAC3-EA45-D2145C96E8F0}"/>
               </a:ext>
             </a:extLst>
           </p:cNvPr>
@@ -727,7 +727,7 @@
           <a:bodyPr/>
           <a:lstStyle/>
           <a:p>
-            <a:fld id="{5A73DC13-68B4-4392-81B5-A9F927C5A546}" type="datetimeFigureOut">
+            <a:fld id="{D472902D-9FDD-4526-874D-273E2F4F275C}" type="datetimeFigureOut">
               <a:rPr kumimoji="1" lang="ja-JP" altLang="en-US" smtClean="0"/>
               <a:t>2026/7/30</a:t>
             </a:fld>
@@ -740,7 +740,7 @@
           <p:cNvPr id="5" name="フッター プレースホルダー 4">
             <a:extLst>
               <a:ext uri="{FF2B5EF4-FFF2-40B4-BE49-F238E27FC236}">
-                <a16:creationId xmlns:a16="http://schemas.microsoft.com/office/drawing/2014/main" id="{C2BEC9C3-D338-3D8C-6CE9-860C3751A940}"/>
+                <a16:creationId xmlns:a16="http://schemas.microsoft.com/office/drawing/2014/main" id="{F0857488-978F-3F9F-C100-D017D72139D8}"/>
               </a:ext>
             </a:extLst>
           </p:cNvPr>
@@ -765,7 +765,7 @@
           <p:cNvPr id="6" name="スライド番号プレースホルダー 5">
             <a:extLst>
               <a:ext uri="{FF2B5EF4-FFF2-40B4-BE49-F238E27FC236}">
-                <a16:creationId xmlns:a16="http://schemas.microsoft.com/office/drawing/2014/main" id="{570030FE-B49E-F762-0FFF-7BFAA3ED050E}"/>
+                <a16:creationId xmlns:a16="http://schemas.microsoft.com/office/drawing/2014/main" id="{157EBD94-14FA-A269-5121-D6C146979364}"/>
               </a:ext>
             </a:extLst>
           </p:cNvPr>
@@ -781,7 +781,7 @@
           <a:bodyPr/>
           <a:lstStyle/>
           <a:p>
-            <a:fld id="{0DA46A8A-CA94-4CC3-8097-27B51B6BF6DE}" type="slidenum">
+            <a:fld id="{AFAA110A-7128-4036-BEAF-CEACF5B4B647}" type="slidenum">
               <a:rPr kumimoji="1" lang="ja-JP" altLang="en-US" smtClean="0"/>
               <a:t>‹#›</a:t>
             </a:fld>
@@ -792,7 +792,7 @@
     </p:spTree>
     <p:extLst>
       <p:ext uri="{BB962C8B-B14F-4D97-AF65-F5344CB8AC3E}">
-        <p14:creationId xmlns:p14="http://schemas.microsoft.com/office/powerpoint/2010/main" val="1970838247"/>
+        <p14:creationId xmlns:p14="http://schemas.microsoft.com/office/powerpoint/2010/main" val="1410037621"/>
       </p:ext>
     </p:extLst>
   </p:cSld>
@@ -824,7 +824,7 @@
           <p:cNvPr id="2" name="タイトル 1">
             <a:extLst>
               <a:ext uri="{FF2B5EF4-FFF2-40B4-BE49-F238E27FC236}">
-                <a16:creationId xmlns:a16="http://schemas.microsoft.com/office/drawing/2014/main" id="{14C7C064-BCE2-2AF3-E551-C90B632E715B}"/>
+                <a16:creationId xmlns:a16="http://schemas.microsoft.com/office/drawing/2014/main" id="{FF061EFC-8A55-1C0F-9A3D-9788423D546F}"/>
               </a:ext>
             </a:extLst>
           </p:cNvPr>
@@ -852,7 +852,7 @@
           <p:cNvPr id="3" name="コンテンツ プレースホルダー 2">
             <a:extLst>
               <a:ext uri="{FF2B5EF4-FFF2-40B4-BE49-F238E27FC236}">
-                <a16:creationId xmlns:a16="http://schemas.microsoft.com/office/drawing/2014/main" id="{7138B3C4-9D10-DFD4-F9E4-E3B154C3264B}"/>
+                <a16:creationId xmlns:a16="http://schemas.microsoft.com/office/drawing/2014/main" id="{2CFD972B-1D28-D3C2-FC1D-CDB76FF78B2C}"/>
               </a:ext>
             </a:extLst>
           </p:cNvPr>
@@ -941,7 +941,7 @@
           <p:cNvPr id="4" name="日付プレースホルダー 3">
             <a:extLst>
               <a:ext uri="{FF2B5EF4-FFF2-40B4-BE49-F238E27FC236}">
-                <a16:creationId xmlns:a16="http://schemas.microsoft.com/office/drawing/2014/main" id="{272DA424-C9B5-2247-076D-669EE739BFD5}"/>
+                <a16:creationId xmlns:a16="http://schemas.microsoft.com/office/drawing/2014/main" id="{1C61DD80-4FC7-7B75-34FB-A5DF5420CC96}"/>
               </a:ext>
             </a:extLst>
           </p:cNvPr>
@@ -957,7 +957,7 @@
           <a:bodyPr/>
           <a:lstStyle/>
           <a:p>
-            <a:fld id="{5A73DC13-68B4-4392-81B5-A9F927C5A546}" type="datetimeFigureOut">
+            <a:fld id="{D472902D-9FDD-4526-874D-273E2F4F275C}" type="datetimeFigureOut">
               <a:rPr kumimoji="1" lang="ja-JP" altLang="en-US" smtClean="0"/>
               <a:t>2026/7/30</a:t>
             </a:fld>
@@ -970,7 +970,7 @@
           <p:cNvPr id="5" name="フッター プレースホルダー 4">
             <a:extLst>
               <a:ext uri="{FF2B5EF4-FFF2-40B4-BE49-F238E27FC236}">
-                <a16:creationId xmlns:a16="http://schemas.microsoft.com/office/drawing/2014/main" id="{3041B71F-EB40-13A6-8C11-46AA5F7B194A}"/>
+                <a16:creationId xmlns:a16="http://schemas.microsoft.com/office/drawing/2014/main" id="{9C3E29EA-6A20-B87F-12A8-20A94CF5C49B}"/>
               </a:ext>
             </a:extLst>
           </p:cNvPr>
@@ -995,7 +995,7 @@
           <p:cNvPr id="6" name="スライド番号プレースホルダー 5">
             <a:extLst>
               <a:ext uri="{FF2B5EF4-FFF2-40B4-BE49-F238E27FC236}">
-                <a16:creationId xmlns:a16="http://schemas.microsoft.com/office/drawing/2014/main" id="{3BB0073F-8F58-E506-837F-05B4338934A7}"/>
+                <a16:creationId xmlns:a16="http://schemas.microsoft.com/office/drawing/2014/main" id="{CF0BA333-2ADC-A208-D5A0-0292FB96572B}"/>
               </a:ext>
             </a:extLst>
           </p:cNvPr>
@@ -1011,7 +1011,7 @@
           <a:bodyPr/>
           <a:lstStyle/>
           <a:p>
-            <a:fld id="{0DA46A8A-CA94-4CC3-8097-27B51B6BF6DE}" type="slidenum">
+            <a:fld id="{AFAA110A-7128-4036-BEAF-CEACF5B4B647}" type="slidenum">
               <a:rPr kumimoji="1" lang="ja-JP" altLang="en-US" smtClean="0"/>
               <a:t>‹#›</a:t>
             </a:fld>
@@ -1022,7 +1022,7 @@
     </p:spTree>
     <p:extLst>
       <p:ext uri="{BB962C8B-B14F-4D97-AF65-F5344CB8AC3E}">
-        <p14:creationId xmlns:p14="http://schemas.microsoft.com/office/powerpoint/2010/main" val="1801509647"/>
+        <p14:creationId xmlns:p14="http://schemas.microsoft.com/office/powerpoint/2010/main" val="2427382472"/>
       </p:ext>
     </p:extLst>
   </p:cSld>
@@ -1054,7 +1054,7 @@
           <p:cNvPr id="2" name="タイトル 1">
             <a:extLst>
               <a:ext uri="{FF2B5EF4-FFF2-40B4-BE49-F238E27FC236}">
-                <a16:creationId xmlns:a16="http://schemas.microsoft.com/office/drawing/2014/main" id="{B7774182-AF44-DC5F-5E0D-D7DD7E6BE754}"/>
+                <a16:creationId xmlns:a16="http://schemas.microsoft.com/office/drawing/2014/main" id="{B74572A3-C2F8-9129-F836-90756F812FA1}"/>
               </a:ext>
             </a:extLst>
           </p:cNvPr>
@@ -1091,7 +1091,7 @@
           <p:cNvPr id="3" name="テキスト プレースホルダー 2">
             <a:extLst>
               <a:ext uri="{FF2B5EF4-FFF2-40B4-BE49-F238E27FC236}">
-                <a16:creationId xmlns:a16="http://schemas.microsoft.com/office/drawing/2014/main" id="{EE63E591-2109-F120-C122-C17556BF95CF}"/>
+                <a16:creationId xmlns:a16="http://schemas.microsoft.com/office/drawing/2014/main" id="{42761550-89CC-9F21-DFFE-81F153930007}"/>
               </a:ext>
             </a:extLst>
           </p:cNvPr>
@@ -1216,7 +1216,7 @@
           <p:cNvPr id="4" name="日付プレースホルダー 3">
             <a:extLst>
               <a:ext uri="{FF2B5EF4-FFF2-40B4-BE49-F238E27FC236}">
-                <a16:creationId xmlns:a16="http://schemas.microsoft.com/office/drawing/2014/main" id="{FA0A3B7A-982E-1400-745E-E315D684495D}"/>
+                <a16:creationId xmlns:a16="http://schemas.microsoft.com/office/drawing/2014/main" id="{EBEF3504-0BC9-07BE-C5B3-64EF0038B706}"/>
               </a:ext>
             </a:extLst>
           </p:cNvPr>
@@ -1232,7 +1232,7 @@
           <a:bodyPr/>
           <a:lstStyle/>
           <a:p>
-            <a:fld id="{5A73DC13-68B4-4392-81B5-A9F927C5A546}" type="datetimeFigureOut">
+            <a:fld id="{D472902D-9FDD-4526-874D-273E2F4F275C}" type="datetimeFigureOut">
               <a:rPr kumimoji="1" lang="ja-JP" altLang="en-US" smtClean="0"/>
               <a:t>2026/7/30</a:t>
             </a:fld>
@@ -1245,7 +1245,7 @@
           <p:cNvPr id="5" name="フッター プレースホルダー 4">
             <a:extLst>
               <a:ext uri="{FF2B5EF4-FFF2-40B4-BE49-F238E27FC236}">
-                <a16:creationId xmlns:a16="http://schemas.microsoft.com/office/drawing/2014/main" id="{890DEA65-2B79-2604-6D83-1563F390BE91}"/>
+                <a16:creationId xmlns:a16="http://schemas.microsoft.com/office/drawing/2014/main" id="{978DED15-D6BB-076C-477E-779ED3F2466B}"/>
               </a:ext>
             </a:extLst>
           </p:cNvPr>
@@ -1270,7 +1270,7 @@
           <p:cNvPr id="6" name="スライド番号プレースホルダー 5">
             <a:extLst>
               <a:ext uri="{FF2B5EF4-FFF2-40B4-BE49-F238E27FC236}">
-                <a16:creationId xmlns:a16="http://schemas.microsoft.com/office/drawing/2014/main" id="{F3530582-5E8A-E612-1B3E-16B2F7DB99F6}"/>
+                <a16:creationId xmlns:a16="http://schemas.microsoft.com/office/drawing/2014/main" id="{7EAE3484-8325-490F-AA3F-EACBCBEA3D39}"/>
               </a:ext>
             </a:extLst>
           </p:cNvPr>
@@ -1286,7 +1286,7 @@
           <a:bodyPr/>
           <a:lstStyle/>
           <a:p>
-            <a:fld id="{0DA46A8A-CA94-4CC3-8097-27B51B6BF6DE}" type="slidenum">
+            <a:fld id="{AFAA110A-7128-4036-BEAF-CEACF5B4B647}" type="slidenum">
               <a:rPr kumimoji="1" lang="ja-JP" altLang="en-US" smtClean="0"/>
               <a:t>‹#›</a:t>
             </a:fld>
@@ -1297,7 +1297,7 @@
     </p:spTree>
     <p:extLst>
       <p:ext uri="{BB962C8B-B14F-4D97-AF65-F5344CB8AC3E}">
-        <p14:creationId xmlns:p14="http://schemas.microsoft.com/office/powerpoint/2010/main" val="3686941187"/>
+        <p14:creationId xmlns:p14="http://schemas.microsoft.com/office/powerpoint/2010/main" val="4277598751"/>
       </p:ext>
     </p:extLst>
   </p:cSld>
@@ -1329,7 +1329,7 @@
           <p:cNvPr id="2" name="タイトル 1">
             <a:extLst>
               <a:ext uri="{FF2B5EF4-FFF2-40B4-BE49-F238E27FC236}">
-                <a16:creationId xmlns:a16="http://schemas.microsoft.com/office/drawing/2014/main" id="{54D4178E-B53D-302C-7F9B-4A6F82E6B325}"/>
+                <a16:creationId xmlns:a16="http://schemas.microsoft.com/office/drawing/2014/main" id="{9B127224-6DDE-4B91-CC9F-D88CCB01B8C2}"/>
               </a:ext>
             </a:extLst>
           </p:cNvPr>
@@ -1357,7 +1357,7 @@
           <p:cNvPr id="3" name="コンテンツ プレースホルダー 2">
             <a:extLst>
               <a:ext uri="{FF2B5EF4-FFF2-40B4-BE49-F238E27FC236}">
-                <a16:creationId xmlns:a16="http://schemas.microsoft.com/office/drawing/2014/main" id="{8099F67D-132F-1EE1-4E82-9E0865836D01}"/>
+                <a16:creationId xmlns:a16="http://schemas.microsoft.com/office/drawing/2014/main" id="{F7D9CB42-F8F2-54E8-AB42-BEFAF0315FE6}"/>
               </a:ext>
             </a:extLst>
           </p:cNvPr>
@@ -1451,7 +1451,7 @@
           <p:cNvPr id="4" name="コンテンツ プレースホルダー 3">
             <a:extLst>
               <a:ext uri="{FF2B5EF4-FFF2-40B4-BE49-F238E27FC236}">
-                <a16:creationId xmlns:a16="http://schemas.microsoft.com/office/drawing/2014/main" id="{55699F82-697F-2556-C584-C3BB98BA864E}"/>
+                <a16:creationId xmlns:a16="http://schemas.microsoft.com/office/drawing/2014/main" id="{CAA438EA-8F0A-BAAC-646C-A30C22700B48}"/>
               </a:ext>
             </a:extLst>
           </p:cNvPr>
@@ -1545,7 +1545,7 @@
           <p:cNvPr id="5" name="日付プレースホルダー 4">
             <a:extLst>
               <a:ext uri="{FF2B5EF4-FFF2-40B4-BE49-F238E27FC236}">
-                <a16:creationId xmlns:a16="http://schemas.microsoft.com/office/drawing/2014/main" id="{3AC91A80-EB69-8314-3EB8-B503F1D47BF6}"/>
+                <a16:creationId xmlns:a16="http://schemas.microsoft.com/office/drawing/2014/main" id="{1EFFFF4B-48D3-982D-80AB-AEFEB57B3DD4}"/>
               </a:ext>
             </a:extLst>
           </p:cNvPr>
@@ -1561,7 +1561,7 @@
           <a:bodyPr/>
           <a:lstStyle/>
           <a:p>
-            <a:fld id="{5A73DC13-68B4-4392-81B5-A9F927C5A546}" type="datetimeFigureOut">
+            <a:fld id="{D472902D-9FDD-4526-874D-273E2F4F275C}" type="datetimeFigureOut">
               <a:rPr kumimoji="1" lang="ja-JP" altLang="en-US" smtClean="0"/>
               <a:t>2026/7/30</a:t>
             </a:fld>
@@ -1574,7 +1574,7 @@
           <p:cNvPr id="6" name="フッター プレースホルダー 5">
             <a:extLst>
               <a:ext uri="{FF2B5EF4-FFF2-40B4-BE49-F238E27FC236}">
-                <a16:creationId xmlns:a16="http://schemas.microsoft.com/office/drawing/2014/main" id="{BA37BEFC-51D5-4AED-C9B8-5A9F0CB9B89D}"/>
+                <a16:creationId xmlns:a16="http://schemas.microsoft.com/office/drawing/2014/main" id="{86B60967-2F08-C966-6787-D7A21D82AAB0}"/>
               </a:ext>
             </a:extLst>
           </p:cNvPr>
@@ -1599,7 +1599,7 @@
           <p:cNvPr id="7" name="スライド番号プレースホルダー 6">
             <a:extLst>
               <a:ext uri="{FF2B5EF4-FFF2-40B4-BE49-F238E27FC236}">
-                <a16:creationId xmlns:a16="http://schemas.microsoft.com/office/drawing/2014/main" id="{42D7B6DD-EBEE-4C45-9D2B-A469A22D5760}"/>
+                <a16:creationId xmlns:a16="http://schemas.microsoft.com/office/drawing/2014/main" id="{401EE1EE-70A8-F2DE-10EC-D536EAA95DBB}"/>
               </a:ext>
             </a:extLst>
           </p:cNvPr>
@@ -1615,7 +1615,7 @@
           <a:bodyPr/>
           <a:lstStyle/>
           <a:p>
-            <a:fld id="{0DA46A8A-CA94-4CC3-8097-27B51B6BF6DE}" type="slidenum">
+            <a:fld id="{AFAA110A-7128-4036-BEAF-CEACF5B4B647}" type="slidenum">
               <a:rPr kumimoji="1" lang="ja-JP" altLang="en-US" smtClean="0"/>
               <a:t>‹#›</a:t>
             </a:fld>
@@ -1626,7 +1626,7 @@
     </p:spTree>
     <p:extLst>
       <p:ext uri="{BB962C8B-B14F-4D97-AF65-F5344CB8AC3E}">
-        <p14:creationId xmlns:p14="http://schemas.microsoft.com/office/powerpoint/2010/main" val="3860121174"/>
+        <p14:creationId xmlns:p14="http://schemas.microsoft.com/office/powerpoint/2010/main" val="2347717882"/>
       </p:ext>
     </p:extLst>
   </p:cSld>
@@ -1658,7 +1658,7 @@
           <p:cNvPr id="2" name="タイトル 1">
             <a:extLst>
               <a:ext uri="{FF2B5EF4-FFF2-40B4-BE49-F238E27FC236}">
-                <a16:creationId xmlns:a16="http://schemas.microsoft.com/office/drawing/2014/main" id="{D9E203B7-EC72-1C13-F197-AB97FD5726A0}"/>
+                <a16:creationId xmlns:a16="http://schemas.microsoft.com/office/drawing/2014/main" id="{8A12CF6B-FCCC-2F54-C78A-5A36E74F598F}"/>
               </a:ext>
             </a:extLst>
           </p:cNvPr>
@@ -1691,7 +1691,7 @@
           <p:cNvPr id="3" name="テキスト プレースホルダー 2">
             <a:extLst>
               <a:ext uri="{FF2B5EF4-FFF2-40B4-BE49-F238E27FC236}">
-                <a16:creationId xmlns:a16="http://schemas.microsoft.com/office/drawing/2014/main" id="{DEA98688-1CDC-7C85-BF93-5E3D52E2AD73}"/>
+                <a16:creationId xmlns:a16="http://schemas.microsoft.com/office/drawing/2014/main" id="{F8D1DAD3-B3BC-C918-2474-6A66AD3BD285}"/>
               </a:ext>
             </a:extLst>
           </p:cNvPr>
@@ -1762,7 +1762,7 @@
           <p:cNvPr id="4" name="コンテンツ プレースホルダー 3">
             <a:extLst>
               <a:ext uri="{FF2B5EF4-FFF2-40B4-BE49-F238E27FC236}">
-                <a16:creationId xmlns:a16="http://schemas.microsoft.com/office/drawing/2014/main" id="{25EE2DE7-05FA-A979-3F06-CCEBFF7A4520}"/>
+                <a16:creationId xmlns:a16="http://schemas.microsoft.com/office/drawing/2014/main" id="{F1FE88F3-3515-F10A-56CB-9CA4DE57F6AD}"/>
               </a:ext>
             </a:extLst>
           </p:cNvPr>
@@ -1856,7 +1856,7 @@
           <p:cNvPr id="5" name="テキスト プレースホルダー 4">
             <a:extLst>
               <a:ext uri="{FF2B5EF4-FFF2-40B4-BE49-F238E27FC236}">
-                <a16:creationId xmlns:a16="http://schemas.microsoft.com/office/drawing/2014/main" id="{242CBE79-F560-0EFF-3AC2-7CC15275E2DA}"/>
+                <a16:creationId xmlns:a16="http://schemas.microsoft.com/office/drawing/2014/main" id="{3CC59EAB-A20A-92D8-B951-C6D4295D33F2}"/>
               </a:ext>
             </a:extLst>
           </p:cNvPr>
@@ -1927,7 +1927,7 @@
           <p:cNvPr id="6" name="コンテンツ プレースホルダー 5">
             <a:extLst>
               <a:ext uri="{FF2B5EF4-FFF2-40B4-BE49-F238E27FC236}">
-                <a16:creationId xmlns:a16="http://schemas.microsoft.com/office/drawing/2014/main" id="{1AA628C1-F400-8751-1D67-3391AC2604ED}"/>
+                <a16:creationId xmlns:a16="http://schemas.microsoft.com/office/drawing/2014/main" id="{CD48C640-8A87-3F19-C554-7B4D1AA9254F}"/>
               </a:ext>
             </a:extLst>
           </p:cNvPr>
@@ -2021,7 +2021,7 @@
           <p:cNvPr id="7" name="日付プレースホルダー 6">
             <a:extLst>
               <a:ext uri="{FF2B5EF4-FFF2-40B4-BE49-F238E27FC236}">
-                <a16:creationId xmlns:a16="http://schemas.microsoft.com/office/drawing/2014/main" id="{813326E6-3D16-DF7E-021B-82DF1104D2F6}"/>
+                <a16:creationId xmlns:a16="http://schemas.microsoft.com/office/drawing/2014/main" id="{A67BD43B-4E6C-D305-27A6-01116E68C23B}"/>
               </a:ext>
             </a:extLst>
           </p:cNvPr>
@@ -2037,7 +2037,7 @@
           <a:bodyPr/>
           <a:lstStyle/>
           <a:p>
-            <a:fld id="{5A73DC13-68B4-4392-81B5-A9F927C5A546}" type="datetimeFigureOut">
+            <a:fld id="{D472902D-9FDD-4526-874D-273E2F4F275C}" type="datetimeFigureOut">
               <a:rPr kumimoji="1" lang="ja-JP" altLang="en-US" smtClean="0"/>
               <a:t>2026/7/30</a:t>
             </a:fld>
@@ -2050,7 +2050,7 @@
           <p:cNvPr id="8" name="フッター プレースホルダー 7">
             <a:extLst>
               <a:ext uri="{FF2B5EF4-FFF2-40B4-BE49-F238E27FC236}">
-                <a16:creationId xmlns:a16="http://schemas.microsoft.com/office/drawing/2014/main" id="{BFD21D8D-828C-D630-EE69-BB8C9552FC1C}"/>
+                <a16:creationId xmlns:a16="http://schemas.microsoft.com/office/drawing/2014/main" id="{877448E5-D86A-FDA3-3AF6-33930B296DA3}"/>
               </a:ext>
             </a:extLst>
           </p:cNvPr>
@@ -2075,7 +2075,7 @@
           <p:cNvPr id="9" name="スライド番号プレースホルダー 8">
             <a:extLst>
               <a:ext uri="{FF2B5EF4-FFF2-40B4-BE49-F238E27FC236}">
-                <a16:creationId xmlns:a16="http://schemas.microsoft.com/office/drawing/2014/main" id="{0CFC1FAD-BD04-8473-9B40-395CB7AE7634}"/>
+                <a16:creationId xmlns:a16="http://schemas.microsoft.com/office/drawing/2014/main" id="{76AA0293-DF1C-8735-52B8-059FCC18239B}"/>
               </a:ext>
             </a:extLst>
           </p:cNvPr>
@@ -2091,7 +2091,7 @@
           <a:bodyPr/>
           <a:lstStyle/>
           <a:p>
-            <a:fld id="{0DA46A8A-CA94-4CC3-8097-27B51B6BF6DE}" type="slidenum">
+            <a:fld id="{AFAA110A-7128-4036-BEAF-CEACF5B4B647}" type="slidenum">
               <a:rPr kumimoji="1" lang="ja-JP" altLang="en-US" smtClean="0"/>
               <a:t>‹#›</a:t>
             </a:fld>
@@ -2102,7 +2102,7 @@
     </p:spTree>
     <p:extLst>
       <p:ext uri="{BB962C8B-B14F-4D97-AF65-F5344CB8AC3E}">
-        <p14:creationId xmlns:p14="http://schemas.microsoft.com/office/powerpoint/2010/main" val="2614172566"/>
+        <p14:creationId xmlns:p14="http://schemas.microsoft.com/office/powerpoint/2010/main" val="1406713092"/>
       </p:ext>
     </p:extLst>
   </p:cSld>
@@ -2134,7 +2134,7 @@
           <p:cNvPr id="2" name="タイトル 1">
             <a:extLst>
               <a:ext uri="{FF2B5EF4-FFF2-40B4-BE49-F238E27FC236}">
-                <a16:creationId xmlns:a16="http://schemas.microsoft.com/office/drawing/2014/main" id="{DD084D1C-07F1-EE42-15E5-6B850F990D30}"/>
+                <a16:creationId xmlns:a16="http://schemas.microsoft.com/office/drawing/2014/main" id="{BDDED8EC-8110-92C5-B4DE-D3A554DA642A}"/>
               </a:ext>
             </a:extLst>
           </p:cNvPr>
@@ -2162,7 +2162,7 @@
           <p:cNvPr id="3" name="日付プレースホルダー 2">
             <a:extLst>
               <a:ext uri="{FF2B5EF4-FFF2-40B4-BE49-F238E27FC236}">
-                <a16:creationId xmlns:a16="http://schemas.microsoft.com/office/drawing/2014/main" id="{060F936D-6B31-B87B-640D-4981D5E04F75}"/>
+                <a16:creationId xmlns:a16="http://schemas.microsoft.com/office/drawing/2014/main" id="{47D8A235-18C3-FD7F-3DAA-1511B7EC70DD}"/>
               </a:ext>
             </a:extLst>
           </p:cNvPr>
@@ -2178,7 +2178,7 @@
           <a:bodyPr/>
           <a:lstStyle/>
           <a:p>
-            <a:fld id="{5A73DC13-68B4-4392-81B5-A9F927C5A546}" type="datetimeFigureOut">
+            <a:fld id="{D472902D-9FDD-4526-874D-273E2F4F275C}" type="datetimeFigureOut">
               <a:rPr kumimoji="1" lang="ja-JP" altLang="en-US" smtClean="0"/>
               <a:t>2026/7/30</a:t>
             </a:fld>
@@ -2191,7 +2191,7 @@
           <p:cNvPr id="4" name="フッター プレースホルダー 3">
             <a:extLst>
               <a:ext uri="{FF2B5EF4-FFF2-40B4-BE49-F238E27FC236}">
-                <a16:creationId xmlns:a16="http://schemas.microsoft.com/office/drawing/2014/main" id="{11BDC1C5-8209-B090-8228-280B59ED5B4F}"/>
+                <a16:creationId xmlns:a16="http://schemas.microsoft.com/office/drawing/2014/main" id="{E131F445-F681-F74B-8A35-BD23E69915CF}"/>
               </a:ext>
             </a:extLst>
           </p:cNvPr>
@@ -2216,7 +2216,7 @@
           <p:cNvPr id="5" name="スライド番号プレースホルダー 4">
             <a:extLst>
               <a:ext uri="{FF2B5EF4-FFF2-40B4-BE49-F238E27FC236}">
-                <a16:creationId xmlns:a16="http://schemas.microsoft.com/office/drawing/2014/main" id="{186BE35B-54C9-FAA5-1352-2CEB55DF18F5}"/>
+                <a16:creationId xmlns:a16="http://schemas.microsoft.com/office/drawing/2014/main" id="{74931AB2-2C06-91CC-581B-86C059B671A4}"/>
               </a:ext>
             </a:extLst>
           </p:cNvPr>
@@ -2232,7 +2232,7 @@
           <a:bodyPr/>
           <a:lstStyle/>
           <a:p>
-            <a:fld id="{0DA46A8A-CA94-4CC3-8097-27B51B6BF6DE}" type="slidenum">
+            <a:fld id="{AFAA110A-7128-4036-BEAF-CEACF5B4B647}" type="slidenum">
               <a:rPr kumimoji="1" lang="ja-JP" altLang="en-US" smtClean="0"/>
               <a:t>‹#›</a:t>
             </a:fld>
@@ -2243,7 +2243,7 @@
     </p:spTree>
     <p:extLst>
       <p:ext uri="{BB962C8B-B14F-4D97-AF65-F5344CB8AC3E}">
-        <p14:creationId xmlns:p14="http://schemas.microsoft.com/office/powerpoint/2010/main" val="2250654536"/>
+        <p14:creationId xmlns:p14="http://schemas.microsoft.com/office/powerpoint/2010/main" val="3568832022"/>
       </p:ext>
     </p:extLst>
   </p:cSld>
@@ -2275,7 +2275,7 @@
           <p:cNvPr id="2" name="日付プレースホルダー 1">
             <a:extLst>
               <a:ext uri="{FF2B5EF4-FFF2-40B4-BE49-F238E27FC236}">
-                <a16:creationId xmlns:a16="http://schemas.microsoft.com/office/drawing/2014/main" id="{E95B3636-3025-9702-3705-D385CC5AD8EE}"/>
+                <a16:creationId xmlns:a16="http://schemas.microsoft.com/office/drawing/2014/main" id="{4562ED4A-46D0-F20E-81FE-1E7167EA0567}"/>
               </a:ext>
             </a:extLst>
           </p:cNvPr>
@@ -2291,7 +2291,7 @@
           <a:bodyPr/>
           <a:lstStyle/>
           <a:p>
-            <a:fld id="{5A73DC13-68B4-4392-81B5-A9F927C5A546}" type="datetimeFigureOut">
+            <a:fld id="{D472902D-9FDD-4526-874D-273E2F4F275C}" type="datetimeFigureOut">
               <a:rPr kumimoji="1" lang="ja-JP" altLang="en-US" smtClean="0"/>
               <a:t>2026/7/30</a:t>
             </a:fld>
@@ -2304,7 +2304,7 @@
           <p:cNvPr id="3" name="フッター プレースホルダー 2">
             <a:extLst>
               <a:ext uri="{FF2B5EF4-FFF2-40B4-BE49-F238E27FC236}">
-                <a16:creationId xmlns:a16="http://schemas.microsoft.com/office/drawing/2014/main" id="{AB99C19C-AC81-5300-B504-C15DBA82EC12}"/>
+                <a16:creationId xmlns:a16="http://schemas.microsoft.com/office/drawing/2014/main" id="{E400E6EF-3217-B8CB-863C-9FE975E96F1F}"/>
               </a:ext>
             </a:extLst>
           </p:cNvPr>
@@ -2329,7 +2329,7 @@
           <p:cNvPr id="4" name="スライド番号プレースホルダー 3">
             <a:extLst>
               <a:ext uri="{FF2B5EF4-FFF2-40B4-BE49-F238E27FC236}">
-                <a16:creationId xmlns:a16="http://schemas.microsoft.com/office/drawing/2014/main" id="{F4054EA5-58B2-3A16-761D-071C266CEF12}"/>
+                <a16:creationId xmlns:a16="http://schemas.microsoft.com/office/drawing/2014/main" id="{B0862D1E-9D9A-C73C-CE6B-CD2C48DD0A4D}"/>
               </a:ext>
             </a:extLst>
           </p:cNvPr>
@@ -2345,7 +2345,7 @@
           <a:bodyPr/>
           <a:lstStyle/>
           <a:p>
-            <a:fld id="{0DA46A8A-CA94-4CC3-8097-27B51B6BF6DE}" type="slidenum">
+            <a:fld id="{AFAA110A-7128-4036-BEAF-CEACF5B4B647}" type="slidenum">
               <a:rPr kumimoji="1" lang="ja-JP" altLang="en-US" smtClean="0"/>
               <a:t>‹#›</a:t>
             </a:fld>
@@ -2356,7 +2356,7 @@
     </p:spTree>
     <p:extLst>
       <p:ext uri="{BB962C8B-B14F-4D97-AF65-F5344CB8AC3E}">
-        <p14:creationId xmlns:p14="http://schemas.microsoft.com/office/powerpoint/2010/main" val="4198133334"/>
+        <p14:creationId xmlns:p14="http://schemas.microsoft.com/office/powerpoint/2010/main" val="3023024515"/>
       </p:ext>
     </p:extLst>
   </p:cSld>
@@ -2388,7 +2388,7 @@
           <p:cNvPr id="2" name="タイトル 1">
             <a:extLst>
               <a:ext uri="{FF2B5EF4-FFF2-40B4-BE49-F238E27FC236}">
-                <a16:creationId xmlns:a16="http://schemas.microsoft.com/office/drawing/2014/main" id="{803AE5DC-9636-9C13-3B6E-555CD05BE36A}"/>
+                <a16:creationId xmlns:a16="http://schemas.microsoft.com/office/drawing/2014/main" id="{89A46B7A-2ED8-A100-07C1-B90F1E05E20A}"/>
               </a:ext>
             </a:extLst>
           </p:cNvPr>
@@ -2425,7 +2425,7 @@
           <p:cNvPr id="3" name="コンテンツ プレースホルダー 2">
             <a:extLst>
               <a:ext uri="{FF2B5EF4-FFF2-40B4-BE49-F238E27FC236}">
-                <a16:creationId xmlns:a16="http://schemas.microsoft.com/office/drawing/2014/main" id="{07D67844-FC76-B7A7-73F0-2FFC48D6163D}"/>
+                <a16:creationId xmlns:a16="http://schemas.microsoft.com/office/drawing/2014/main" id="{C2886209-D79F-889B-97DD-2057B0DED194}"/>
               </a:ext>
             </a:extLst>
           </p:cNvPr>
@@ -2547,7 +2547,7 @@
           <p:cNvPr id="4" name="テキスト プレースホルダー 3">
             <a:extLst>
               <a:ext uri="{FF2B5EF4-FFF2-40B4-BE49-F238E27FC236}">
-                <a16:creationId xmlns:a16="http://schemas.microsoft.com/office/drawing/2014/main" id="{E55C282F-E9F7-93F8-1DD3-9F7C3BAC6A0D}"/>
+                <a16:creationId xmlns:a16="http://schemas.microsoft.com/office/drawing/2014/main" id="{3C78471F-FC13-B833-00D7-3B79CB269613}"/>
               </a:ext>
             </a:extLst>
           </p:cNvPr>
@@ -2618,7 +2618,7 @@
           <p:cNvPr id="5" name="日付プレースホルダー 4">
             <a:extLst>
               <a:ext uri="{FF2B5EF4-FFF2-40B4-BE49-F238E27FC236}">
-                <a16:creationId xmlns:a16="http://schemas.microsoft.com/office/drawing/2014/main" id="{3FA9E944-5845-100E-38A7-9F28D8F3DE49}"/>
+                <a16:creationId xmlns:a16="http://schemas.microsoft.com/office/drawing/2014/main" id="{6F834791-9D9D-8DD6-9A9B-E9E6078B373D}"/>
               </a:ext>
             </a:extLst>
           </p:cNvPr>
@@ -2634,7 +2634,7 @@
           <a:bodyPr/>
           <a:lstStyle/>
           <a:p>
-            <a:fld id="{5A73DC13-68B4-4392-81B5-A9F927C5A546}" type="datetimeFigureOut">
+            <a:fld id="{D472902D-9FDD-4526-874D-273E2F4F275C}" type="datetimeFigureOut">
               <a:rPr kumimoji="1" lang="ja-JP" altLang="en-US" smtClean="0"/>
               <a:t>2026/7/30</a:t>
             </a:fld>
@@ -2647,7 +2647,7 @@
           <p:cNvPr id="6" name="フッター プレースホルダー 5">
             <a:extLst>
               <a:ext uri="{FF2B5EF4-FFF2-40B4-BE49-F238E27FC236}">
-                <a16:creationId xmlns:a16="http://schemas.microsoft.com/office/drawing/2014/main" id="{F81EB15C-A429-69A3-6EB3-14E33E9DE8AB}"/>
+                <a16:creationId xmlns:a16="http://schemas.microsoft.com/office/drawing/2014/main" id="{3A3E58E5-0F46-78EA-BDE4-8357159BF992}"/>
               </a:ext>
             </a:extLst>
           </p:cNvPr>
@@ -2672,7 +2672,7 @@
           <p:cNvPr id="7" name="スライド番号プレースホルダー 6">
             <a:extLst>
               <a:ext uri="{FF2B5EF4-FFF2-40B4-BE49-F238E27FC236}">
-                <a16:creationId xmlns:a16="http://schemas.microsoft.com/office/drawing/2014/main" id="{F1404FFD-6EFE-3713-D6ED-AF071B11EB29}"/>
+                <a16:creationId xmlns:a16="http://schemas.microsoft.com/office/drawing/2014/main" id="{135A4078-3F28-931C-788E-3E1707AC65EB}"/>
               </a:ext>
             </a:extLst>
           </p:cNvPr>
@@ -2688,7 +2688,7 @@
           <a:bodyPr/>
           <a:lstStyle/>
           <a:p>
-            <a:fld id="{0DA46A8A-CA94-4CC3-8097-27B51B6BF6DE}" type="slidenum">
+            <a:fld id="{AFAA110A-7128-4036-BEAF-CEACF5B4B647}" type="slidenum">
               <a:rPr kumimoji="1" lang="ja-JP" altLang="en-US" smtClean="0"/>
               <a:t>‹#›</a:t>
             </a:fld>
@@ -2699,7 +2699,7 @@
     </p:spTree>
     <p:extLst>
       <p:ext uri="{BB962C8B-B14F-4D97-AF65-F5344CB8AC3E}">
-        <p14:creationId xmlns:p14="http://schemas.microsoft.com/office/powerpoint/2010/main" val="2373054680"/>
+        <p14:creationId xmlns:p14="http://schemas.microsoft.com/office/powerpoint/2010/main" val="2370972005"/>
       </p:ext>
     </p:extLst>
   </p:cSld>
@@ -2731,7 +2731,7 @@
           <p:cNvPr id="2" name="タイトル 1">
             <a:extLst>
               <a:ext uri="{FF2B5EF4-FFF2-40B4-BE49-F238E27FC236}">
-                <a16:creationId xmlns:a16="http://schemas.microsoft.com/office/drawing/2014/main" id="{71790BF1-CEB1-AA40-8560-F276D1BA109F}"/>
+                <a16:creationId xmlns:a16="http://schemas.microsoft.com/office/drawing/2014/main" id="{6337A465-AA94-D68E-CF27-28442BEAB026}"/>
               </a:ext>
             </a:extLst>
           </p:cNvPr>
@@ -2768,7 +2768,7 @@
           <p:cNvPr id="3" name="図プレースホルダー 2">
             <a:extLst>
               <a:ext uri="{FF2B5EF4-FFF2-40B4-BE49-F238E27FC236}">
-                <a16:creationId xmlns:a16="http://schemas.microsoft.com/office/drawing/2014/main" id="{62001FFE-3FBB-F354-668D-54C6B525CF68}"/>
+                <a16:creationId xmlns:a16="http://schemas.microsoft.com/office/drawing/2014/main" id="{149235D3-FD36-B588-2330-7B0307D75101}"/>
               </a:ext>
             </a:extLst>
           </p:cNvPr>
@@ -2835,7 +2835,7 @@
           <p:cNvPr id="4" name="テキスト プレースホルダー 3">
             <a:extLst>
               <a:ext uri="{FF2B5EF4-FFF2-40B4-BE49-F238E27FC236}">
-                <a16:creationId xmlns:a16="http://schemas.microsoft.com/office/drawing/2014/main" id="{E0D3B052-89C8-3E76-96BD-B48F1541C07D}"/>
+                <a16:creationId xmlns:a16="http://schemas.microsoft.com/office/drawing/2014/main" id="{B3213603-B1B8-23D7-C4DE-4BD29D822287}"/>
               </a:ext>
             </a:extLst>
           </p:cNvPr>
@@ -2906,7 +2906,7 @@
           <p:cNvPr id="5" name="日付プレースホルダー 4">
             <a:extLst>
               <a:ext uri="{FF2B5EF4-FFF2-40B4-BE49-F238E27FC236}">
-                <a16:creationId xmlns:a16="http://schemas.microsoft.com/office/drawing/2014/main" id="{07795F56-77A8-B451-5B1F-B9CC45B16A9A}"/>
+                <a16:creationId xmlns:a16="http://schemas.microsoft.com/office/drawing/2014/main" id="{6603AEEB-FB33-F218-D191-4324D60A7288}"/>
               </a:ext>
             </a:extLst>
           </p:cNvPr>
@@ -2922,7 +2922,7 @@
           <a:bodyPr/>
           <a:lstStyle/>
           <a:p>
-            <a:fld id="{5A73DC13-68B4-4392-81B5-A9F927C5A546}" type="datetimeFigureOut">
+            <a:fld id="{D472902D-9FDD-4526-874D-273E2F4F275C}" type="datetimeFigureOut">
               <a:rPr kumimoji="1" lang="ja-JP" altLang="en-US" smtClean="0"/>
               <a:t>2026/7/30</a:t>
             </a:fld>
@@ -2935,7 +2935,7 @@
           <p:cNvPr id="6" name="フッター プレースホルダー 5">
             <a:extLst>
               <a:ext uri="{FF2B5EF4-FFF2-40B4-BE49-F238E27FC236}">
-                <a16:creationId xmlns:a16="http://schemas.microsoft.com/office/drawing/2014/main" id="{279FE0CA-35C2-1D84-FBCB-BD03446DF9B2}"/>
+                <a16:creationId xmlns:a16="http://schemas.microsoft.com/office/drawing/2014/main" id="{F3D0F71E-3C13-9D97-8FCD-EBB92345B69C}"/>
               </a:ext>
             </a:extLst>
           </p:cNvPr>
@@ -2960,7 +2960,7 @@
           <p:cNvPr id="7" name="スライド番号プレースホルダー 6">
             <a:extLst>
               <a:ext uri="{FF2B5EF4-FFF2-40B4-BE49-F238E27FC236}">
-                <a16:creationId xmlns:a16="http://schemas.microsoft.com/office/drawing/2014/main" id="{E9440F01-B154-B87F-98D5-453BD58FFE42}"/>
+                <a16:creationId xmlns:a16="http://schemas.microsoft.com/office/drawing/2014/main" id="{AF02B310-F43B-49F2-4262-7B6610BEF5D0}"/>
               </a:ext>
             </a:extLst>
           </p:cNvPr>
@@ -2976,7 +2976,7 @@
           <a:bodyPr/>
           <a:lstStyle/>
           <a:p>
-            <a:fld id="{0DA46A8A-CA94-4CC3-8097-27B51B6BF6DE}" type="slidenum">
+            <a:fld id="{AFAA110A-7128-4036-BEAF-CEACF5B4B647}" type="slidenum">
               <a:rPr kumimoji="1" lang="ja-JP" altLang="en-US" smtClean="0"/>
               <a:t>‹#›</a:t>
             </a:fld>
@@ -2987,7 +2987,7 @@
     </p:spTree>
     <p:extLst>
       <p:ext uri="{BB962C8B-B14F-4D97-AF65-F5344CB8AC3E}">
-        <p14:creationId xmlns:p14="http://schemas.microsoft.com/office/powerpoint/2010/main" val="3357267376"/>
+        <p14:creationId xmlns:p14="http://schemas.microsoft.com/office/powerpoint/2010/main" val="3491122593"/>
       </p:ext>
     </p:extLst>
   </p:cSld>
@@ -3024,7 +3024,7 @@
           <p:cNvPr id="2" name="タイトル プレースホルダー 1">
             <a:extLst>
               <a:ext uri="{FF2B5EF4-FFF2-40B4-BE49-F238E27FC236}">
-                <a16:creationId xmlns:a16="http://schemas.microsoft.com/office/drawing/2014/main" id="{B83200AC-DD30-2C27-0F2C-498C992A1E55}"/>
+                <a16:creationId xmlns:a16="http://schemas.microsoft.com/office/drawing/2014/main" id="{5AADD356-D4F2-B57E-090C-C43A234D6E3E}"/>
               </a:ext>
             </a:extLst>
           </p:cNvPr>
@@ -3062,7 +3062,7 @@
           <p:cNvPr id="3" name="テキスト プレースホルダー 2">
             <a:extLst>
               <a:ext uri="{FF2B5EF4-FFF2-40B4-BE49-F238E27FC236}">
-                <a16:creationId xmlns:a16="http://schemas.microsoft.com/office/drawing/2014/main" id="{77921D94-A27F-9F41-2F17-B8447FEF2180}"/>
+                <a16:creationId xmlns:a16="http://schemas.microsoft.com/office/drawing/2014/main" id="{0A8B7F7A-2FFF-73CA-2734-50703724E99F}"/>
               </a:ext>
             </a:extLst>
           </p:cNvPr>
@@ -3161,7 +3161,7 @@
           <p:cNvPr id="4" name="日付プレースホルダー 3">
             <a:extLst>
               <a:ext uri="{FF2B5EF4-FFF2-40B4-BE49-F238E27FC236}">
-                <a16:creationId xmlns:a16="http://schemas.microsoft.com/office/drawing/2014/main" id="{B86A4C14-33F4-AA90-2E30-7035F5363D6C}"/>
+                <a16:creationId xmlns:a16="http://schemas.microsoft.com/office/drawing/2014/main" id="{8D0538CF-FED6-214C-A8B6-C155BCD1F0D3}"/>
               </a:ext>
             </a:extLst>
           </p:cNvPr>
@@ -3195,7 +3195,7 @@
             </a:lvl1pPr>
           </a:lstStyle>
           <a:p>
-            <a:fld id="{5A73DC13-68B4-4392-81B5-A9F927C5A546}" type="datetimeFigureOut">
+            <a:fld id="{D472902D-9FDD-4526-874D-273E2F4F275C}" type="datetimeFigureOut">
               <a:rPr kumimoji="1" lang="ja-JP" altLang="en-US" smtClean="0"/>
               <a:t>2026/7/30</a:t>
             </a:fld>
@@ -3208,7 +3208,7 @@
           <p:cNvPr id="5" name="フッター プレースホルダー 4">
             <a:extLst>
               <a:ext uri="{FF2B5EF4-FFF2-40B4-BE49-F238E27FC236}">
-                <a16:creationId xmlns:a16="http://schemas.microsoft.com/office/drawing/2014/main" id="{7E69DF06-B92D-46CD-08F3-969B850F2B17}"/>
+                <a16:creationId xmlns:a16="http://schemas.microsoft.com/office/drawing/2014/main" id="{2CF34DE9-F9C3-8F72-ACA2-40966FA58F9D}"/>
               </a:ext>
             </a:extLst>
           </p:cNvPr>
@@ -3251,7 +3251,7 @@
           <p:cNvPr id="6" name="スライド番号プレースホルダー 5">
             <a:extLst>
               <a:ext uri="{FF2B5EF4-FFF2-40B4-BE49-F238E27FC236}">
-                <a16:creationId xmlns:a16="http://schemas.microsoft.com/office/drawing/2014/main" id="{2C3B324F-0D36-6B3B-B492-1A0CBC73ACA1}"/>
+                <a16:creationId xmlns:a16="http://schemas.microsoft.com/office/drawing/2014/main" id="{ECCDAE0F-F36B-A1C0-A865-DF9E5075A97B}"/>
               </a:ext>
             </a:extLst>
           </p:cNvPr>
@@ -3285,7 +3285,7 @@
             </a:lvl1pPr>
           </a:lstStyle>
           <a:p>
-            <a:fld id="{0DA46A8A-CA94-4CC3-8097-27B51B6BF6DE}" type="slidenum">
+            <a:fld id="{AFAA110A-7128-4036-BEAF-CEACF5B4B647}" type="slidenum">
               <a:rPr kumimoji="1" lang="ja-JP" altLang="en-US" smtClean="0"/>
               <a:t>‹#›</a:t>
             </a:fld>
@@ -3296,7 +3296,7 @@
     </p:spTree>
     <p:extLst>
       <p:ext uri="{BB962C8B-B14F-4D97-AF65-F5344CB8AC3E}">
-        <p14:creationId xmlns:p14="http://schemas.microsoft.com/office/powerpoint/2010/main" val="3605751975"/>
+        <p14:creationId xmlns:p14="http://schemas.microsoft.com/office/powerpoint/2010/main" val="3736364677"/>
       </p:ext>
     </p:extLst>
   </p:cSld>
@@ -3619,7 +3619,7 @@
           <p:cNvPr id="2" name="テキスト ボックス 1">
             <a:extLst>
               <a:ext uri="{FF2B5EF4-FFF2-40B4-BE49-F238E27FC236}">
-                <a16:creationId xmlns:a16="http://schemas.microsoft.com/office/drawing/2014/main" id="{5F271A0C-276D-B77E-0040-CC0BE4F8A2B0}"/>
+                <a16:creationId xmlns:a16="http://schemas.microsoft.com/office/drawing/2014/main" id="{B73DB425-C707-B3B8-8ED5-D034AC804C6E}"/>
               </a:ext>
             </a:extLst>
           </p:cNvPr>
@@ -3665,7 +3665,7 @@
           <p:cNvPr id="3" name="テキスト ボックス 2">
             <a:extLst>
               <a:ext uri="{FF2B5EF4-FFF2-40B4-BE49-F238E27FC236}">
-                <a16:creationId xmlns:a16="http://schemas.microsoft.com/office/drawing/2014/main" id="{D559E040-6DB9-CF62-BFCC-D100996E9799}"/>
+                <a16:creationId xmlns:a16="http://schemas.microsoft.com/office/drawing/2014/main" id="{A6FF35A0-D1B0-7D25-29CD-B8CB7A4EDA89}"/>
               </a:ext>
             </a:extLst>
           </p:cNvPr>
@@ -3714,7 +3714,7 @@
           <p:cNvPr id="4" name="テキスト ボックス 3">
             <a:extLst>
               <a:ext uri="{FF2B5EF4-FFF2-40B4-BE49-F238E27FC236}">
-                <a16:creationId xmlns:a16="http://schemas.microsoft.com/office/drawing/2014/main" id="{0520A25D-DD05-5D7F-B17E-DCDC0432DC2F}"/>
+                <a16:creationId xmlns:a16="http://schemas.microsoft.com/office/drawing/2014/main" id="{1E362B6F-A5BC-3945-2F2C-C488A02CA010}"/>
               </a:ext>
             </a:extLst>
           </p:cNvPr>
@@ -3754,7 +3754,7 @@
           <p:cNvPr id="5" name="テキスト ボックス 4">
             <a:extLst>
               <a:ext uri="{FF2B5EF4-FFF2-40B4-BE49-F238E27FC236}">
-                <a16:creationId xmlns:a16="http://schemas.microsoft.com/office/drawing/2014/main" id="{665FBC2D-E8A3-93EC-BF39-BCD8D481A8EA}"/>
+                <a16:creationId xmlns:a16="http://schemas.microsoft.com/office/drawing/2014/main" id="{ED339E85-5B6B-800C-EAC7-7339949E945B}"/>
               </a:ext>
             </a:extLst>
           </p:cNvPr>
@@ -3801,7 +3801,7 @@
             <a:hlinkClick r:id="" action="ppaction://media"/>
             <a:extLst>
               <a:ext uri="{FF2B5EF4-FFF2-40B4-BE49-F238E27FC236}">
-                <a16:creationId xmlns:a16="http://schemas.microsoft.com/office/drawing/2014/main" id="{28BD7612-443D-9DC0-C12D-D2938869BBF4}"/>
+                <a16:creationId xmlns:a16="http://schemas.microsoft.com/office/drawing/2014/main" id="{769C6ACE-5B56-51E3-5628-6FD4ED9156C7}"/>
               </a:ext>
             </a:extLst>
           </p:cNvPr>
@@ -3836,7 +3836,7 @@
     </p:spTree>
     <p:extLst>
       <p:ext uri="{BB962C8B-B14F-4D97-AF65-F5344CB8AC3E}">
-        <p14:creationId xmlns:p14="http://schemas.microsoft.com/office/powerpoint/2010/main" val="1944866285"/>
+        <p14:creationId xmlns:p14="http://schemas.microsoft.com/office/powerpoint/2010/main" val="1766904631"/>
       </p:ext>
     </p:extLst>
   </p:cSld>
@@ -3960,7 +3960,7 @@
           <p:cNvPr id="2" name="テキスト ボックス 1">
             <a:extLst>
               <a:ext uri="{FF2B5EF4-FFF2-40B4-BE49-F238E27FC236}">
-                <a16:creationId xmlns:a16="http://schemas.microsoft.com/office/drawing/2014/main" id="{48B62BA2-3D5C-D879-7A3E-BA9B2AE0F33F}"/>
+                <a16:creationId xmlns:a16="http://schemas.microsoft.com/office/drawing/2014/main" id="{FB02E002-0F86-E734-3C78-028C718DC2E4}"/>
               </a:ext>
             </a:extLst>
           </p:cNvPr>
@@ -4006,7 +4006,7 @@
           <p:cNvPr id="3" name="テキスト ボックス 2">
             <a:extLst>
               <a:ext uri="{FF2B5EF4-FFF2-40B4-BE49-F238E27FC236}">
-                <a16:creationId xmlns:a16="http://schemas.microsoft.com/office/drawing/2014/main" id="{9506BCAE-586D-B891-4120-0C1FF2A55146}"/>
+                <a16:creationId xmlns:a16="http://schemas.microsoft.com/office/drawing/2014/main" id="{2D127FA0-A559-587E-753C-64D22195FD04}"/>
               </a:ext>
             </a:extLst>
           </p:cNvPr>
@@ -4046,7 +4046,7 @@
           <p:cNvPr id="4" name="テキスト ボックス 3">
             <a:extLst>
               <a:ext uri="{FF2B5EF4-FFF2-40B4-BE49-F238E27FC236}">
-                <a16:creationId xmlns:a16="http://schemas.microsoft.com/office/drawing/2014/main" id="{D3F5BA82-125B-412A-C6E9-F0185B97EC15}"/>
+                <a16:creationId xmlns:a16="http://schemas.microsoft.com/office/drawing/2014/main" id="{1F179CBA-FED2-25CF-276B-BBFFDC8C1475}"/>
               </a:ext>
             </a:extLst>
           </p:cNvPr>
@@ -4076,14 +4076,17 @@
                 </a:solidFill>
                 <a:latin typeface="Arial" panose="020B0604020202020204" pitchFamily="34" charset="0"/>
               </a:rPr>
-              <a:t>This is a Next</a:t>
-            </a:r>
-            <a:endParaRPr kumimoji="1" lang="ja-JP" altLang="en-US" sz="2000">
-              <a:solidFill>
-                <a:srgbClr val="333333"/>
-              </a:solidFill>
-              <a:latin typeface="Arial" panose="020B0604020202020204" pitchFamily="34" charset="0"/>
-            </a:endParaRPr>
+              <a:t>Dqwalk Mukatoshin</a:t>
+            </a:r>
+            <a:r>
+              <a:rPr kumimoji="1" lang="ja-JP" altLang="en-US" sz="2000">
+                <a:solidFill>
+                  <a:srgbClr val="333333"/>
+                </a:solidFill>
+                <a:latin typeface="Arial" panose="020B0604020202020204" pitchFamily="34" charset="0"/>
+              </a:rPr>
+              <a:t>の目的、構成、実装を公開コードから確認できるプロジェクトです。</a:t>
+            </a:r>
           </a:p>
         </p:txBody>
       </p:sp>
@@ -4092,7 +4095,7 @@
           <p:cNvPr id="5" name="テキスト ボックス 4">
             <a:extLst>
               <a:ext uri="{FF2B5EF4-FFF2-40B4-BE49-F238E27FC236}">
-                <a16:creationId xmlns:a16="http://schemas.microsoft.com/office/drawing/2014/main" id="{D322636A-13EF-8FB3-ADFC-A4037E063529}"/>
+                <a16:creationId xmlns:a16="http://schemas.microsoft.com/office/drawing/2014/main" id="{24A5E07C-68DD-6245-DD65-8E8B8996EE73}"/>
               </a:ext>
             </a:extLst>
           </p:cNvPr>
@@ -4139,7 +4142,7 @@
             <a:hlinkClick r:id="" action="ppaction://media"/>
             <a:extLst>
               <a:ext uri="{FF2B5EF4-FFF2-40B4-BE49-F238E27FC236}">
-                <a16:creationId xmlns:a16="http://schemas.microsoft.com/office/drawing/2014/main" id="{CDDB2F51-9831-0813-593C-492967FFE3AF}"/>
+                <a16:creationId xmlns:a16="http://schemas.microsoft.com/office/drawing/2014/main" id="{F8573FE3-98F4-349B-3DCB-BED22E66D586}"/>
               </a:ext>
             </a:extLst>
           </p:cNvPr>
@@ -4174,7 +4177,7 @@
     </p:spTree>
     <p:extLst>
       <p:ext uri="{BB962C8B-B14F-4D97-AF65-F5344CB8AC3E}">
-        <p14:creationId xmlns:p14="http://schemas.microsoft.com/office/powerpoint/2010/main" val="2702866337"/>
+        <p14:creationId xmlns:p14="http://schemas.microsoft.com/office/powerpoint/2010/main" val="513163797"/>
       </p:ext>
     </p:extLst>
   </p:cSld>
@@ -4183,10 +4186,10 @@
   </p:clrMapOvr>
   <mc:AlternateContent xmlns:mc="http://schemas.openxmlformats.org/markup-compatibility/2006">
     <mc:Choice xmlns:p14="http://schemas.microsoft.com/office/powerpoint/2010/main" Requires="p14">
-      <p:transition spd="slow" p14:dur="2000" advTm="5000"/>
+      <p:transition spd="slow" p14:dur="2000" advTm="8000"/>
     </mc:Choice>
     <mc:Fallback>
-      <p:transition spd="slow" advTm="5000"/>
+      <p:transition spd="slow" advTm="8000"/>
     </mc:Fallback>
   </mc:AlternateContent>
   <p:timing>
@@ -4217,7 +4220,7 @@
                                   <p:childTnLst>
                                     <p:cmd type="call" cmd="playFrom(0.0)">
                                       <p:cBhvr>
-                                        <p:cTn id="6" dur="2148" fill="hold"/>
+                                        <p:cTn id="6" dur="7491" fill="hold"/>
                                         <p:tgtEl>
                                           <p:spTgt spid="6"/>
                                         </p:tgtEl>
@@ -4298,7 +4301,7 @@
           <p:cNvPr id="2" name="テキスト ボックス 1">
             <a:extLst>
               <a:ext uri="{FF2B5EF4-FFF2-40B4-BE49-F238E27FC236}">
-                <a16:creationId xmlns:a16="http://schemas.microsoft.com/office/drawing/2014/main" id="{F3287D37-1071-091E-DD8F-451C71D67EE1}"/>
+                <a16:creationId xmlns:a16="http://schemas.microsoft.com/office/drawing/2014/main" id="{5DB3CAE4-DCF2-011B-674E-89E90614300A}"/>
               </a:ext>
             </a:extLst>
           </p:cNvPr>
@@ -4344,7 +4347,7 @@
           <p:cNvPr id="3" name="テキスト ボックス 2">
             <a:extLst>
               <a:ext uri="{FF2B5EF4-FFF2-40B4-BE49-F238E27FC236}">
-                <a16:creationId xmlns:a16="http://schemas.microsoft.com/office/drawing/2014/main" id="{07F700A6-25E6-392B-EAF0-E293E10FF360}"/>
+                <a16:creationId xmlns:a16="http://schemas.microsoft.com/office/drawing/2014/main" id="{6A20AE52-4173-9F58-0FD9-5C27B44D12D8}"/>
               </a:ext>
             </a:extLst>
           </p:cNvPr>
@@ -4384,7 +4387,7 @@
           <p:cNvPr id="4" name="テキスト ボックス 3">
             <a:extLst>
               <a:ext uri="{FF2B5EF4-FFF2-40B4-BE49-F238E27FC236}">
-                <a16:creationId xmlns:a16="http://schemas.microsoft.com/office/drawing/2014/main" id="{8AB15DF2-CEEB-5992-C93C-9E28AA432B33}"/>
+                <a16:creationId xmlns:a16="http://schemas.microsoft.com/office/drawing/2014/main" id="{9EBF860C-E6F1-809B-53EF-8970B2EA1A29}"/>
               </a:ext>
             </a:extLst>
           </p:cNvPr>
@@ -4479,7 +4482,7 @@
           <p:cNvPr id="5" name="テキスト ボックス 4">
             <a:extLst>
               <a:ext uri="{FF2B5EF4-FFF2-40B4-BE49-F238E27FC236}">
-                <a16:creationId xmlns:a16="http://schemas.microsoft.com/office/drawing/2014/main" id="{CC851319-2CEC-0DF3-2A4E-BAB1A6D320C2}"/>
+                <a16:creationId xmlns:a16="http://schemas.microsoft.com/office/drawing/2014/main" id="{A1D8A5D7-18AB-40BC-D06A-5FEA92411103}"/>
               </a:ext>
             </a:extLst>
           </p:cNvPr>
@@ -4526,7 +4529,7 @@
             <a:hlinkClick r:id="" action="ppaction://media"/>
             <a:extLst>
               <a:ext uri="{FF2B5EF4-FFF2-40B4-BE49-F238E27FC236}">
-                <a16:creationId xmlns:a16="http://schemas.microsoft.com/office/drawing/2014/main" id="{7CAF3A4F-DAE9-6B1B-664D-39C976E51097}"/>
+                <a16:creationId xmlns:a16="http://schemas.microsoft.com/office/drawing/2014/main" id="{2574325C-62F0-42AD-30AD-8F945B002EA3}"/>
               </a:ext>
             </a:extLst>
           </p:cNvPr>
@@ -4561,7 +4564,7 @@
     </p:spTree>
     <p:extLst>
       <p:ext uri="{BB962C8B-B14F-4D97-AF65-F5344CB8AC3E}">
-        <p14:creationId xmlns:p14="http://schemas.microsoft.com/office/powerpoint/2010/main" val="4210267479"/>
+        <p14:creationId xmlns:p14="http://schemas.microsoft.com/office/powerpoint/2010/main" val="3358580778"/>
       </p:ext>
     </p:extLst>
   </p:cSld>
@@ -4685,7 +4688,7 @@
           <p:cNvPr id="2" name="テキスト ボックス 1">
             <a:extLst>
               <a:ext uri="{FF2B5EF4-FFF2-40B4-BE49-F238E27FC236}">
-                <a16:creationId xmlns:a16="http://schemas.microsoft.com/office/drawing/2014/main" id="{DA285D23-07C6-768D-FDB8-052DE9FBA9F3}"/>
+                <a16:creationId xmlns:a16="http://schemas.microsoft.com/office/drawing/2014/main" id="{EFAEADE8-4237-DD2F-6E7F-D9FCF745ABF8}"/>
               </a:ext>
             </a:extLst>
           </p:cNvPr>
@@ -4731,7 +4734,7 @@
           <p:cNvPr id="3" name="テキスト ボックス 2">
             <a:extLst>
               <a:ext uri="{FF2B5EF4-FFF2-40B4-BE49-F238E27FC236}">
-                <a16:creationId xmlns:a16="http://schemas.microsoft.com/office/drawing/2014/main" id="{E5CC5DB6-2793-72A9-FB34-82042B3788A0}"/>
+                <a16:creationId xmlns:a16="http://schemas.microsoft.com/office/drawing/2014/main" id="{D54E723C-3FC8-75BF-E172-3F54A6F5525B}"/>
               </a:ext>
             </a:extLst>
           </p:cNvPr>
@@ -4771,7 +4774,7 @@
           <p:cNvPr id="4" name="テキスト ボックス 3">
             <a:extLst>
               <a:ext uri="{FF2B5EF4-FFF2-40B4-BE49-F238E27FC236}">
-                <a16:creationId xmlns:a16="http://schemas.microsoft.com/office/drawing/2014/main" id="{5D2C66FD-6449-6CE4-430F-8F6B67B560EA}"/>
+                <a16:creationId xmlns:a16="http://schemas.microsoft.com/office/drawing/2014/main" id="{2903D2C7-7C59-EE82-0DC8-7463D8C3ACAF}"/>
               </a:ext>
             </a:extLst>
           </p:cNvPr>
@@ -4881,7 +4884,7 @@
           <p:cNvPr id="5" name="テキスト ボックス 4">
             <a:extLst>
               <a:ext uri="{FF2B5EF4-FFF2-40B4-BE49-F238E27FC236}">
-                <a16:creationId xmlns:a16="http://schemas.microsoft.com/office/drawing/2014/main" id="{F3A2F1CD-246A-B630-D5A7-0CD73B3D69F2}"/>
+                <a16:creationId xmlns:a16="http://schemas.microsoft.com/office/drawing/2014/main" id="{BDA07C89-B2F6-B5DE-3E6C-E0C1AE0D6BE4}"/>
               </a:ext>
             </a:extLst>
           </p:cNvPr>
@@ -4928,7 +4931,7 @@
             <a:hlinkClick r:id="" action="ppaction://media"/>
             <a:extLst>
               <a:ext uri="{FF2B5EF4-FFF2-40B4-BE49-F238E27FC236}">
-                <a16:creationId xmlns:a16="http://schemas.microsoft.com/office/drawing/2014/main" id="{088700C3-B094-E71E-A525-71BF22EE6E50}"/>
+                <a16:creationId xmlns:a16="http://schemas.microsoft.com/office/drawing/2014/main" id="{7AFD53BE-0725-B2F2-57E2-5D09DD55B5E2}"/>
               </a:ext>
             </a:extLst>
           </p:cNvPr>
@@ -4963,7 +4966,7 @@
     </p:spTree>
     <p:extLst>
       <p:ext uri="{BB962C8B-B14F-4D97-AF65-F5344CB8AC3E}">
-        <p14:creationId xmlns:p14="http://schemas.microsoft.com/office/powerpoint/2010/main" val="3310974557"/>
+        <p14:creationId xmlns:p14="http://schemas.microsoft.com/office/powerpoint/2010/main" val="2655107681"/>
       </p:ext>
     </p:extLst>
   </p:cSld>
@@ -5087,7 +5090,7 @@
           <p:cNvPr id="2" name="テキスト ボックス 1">
             <a:extLst>
               <a:ext uri="{FF2B5EF4-FFF2-40B4-BE49-F238E27FC236}">
-                <a16:creationId xmlns:a16="http://schemas.microsoft.com/office/drawing/2014/main" id="{F6AF1290-971B-B785-F86B-8FEDF5813DA2}"/>
+                <a16:creationId xmlns:a16="http://schemas.microsoft.com/office/drawing/2014/main" id="{0371ABB2-6276-1565-6921-D9D507818CD5}"/>
               </a:ext>
             </a:extLst>
           </p:cNvPr>
@@ -5133,7 +5136,7 @@
           <p:cNvPr id="3" name="テキスト ボックス 2">
             <a:extLst>
               <a:ext uri="{FF2B5EF4-FFF2-40B4-BE49-F238E27FC236}">
-                <a16:creationId xmlns:a16="http://schemas.microsoft.com/office/drawing/2014/main" id="{8E95EF91-90C9-E617-201C-690826176C25}"/>
+                <a16:creationId xmlns:a16="http://schemas.microsoft.com/office/drawing/2014/main" id="{19F81020-F205-4632-0418-B74C7F2788E6}"/>
               </a:ext>
             </a:extLst>
           </p:cNvPr>
@@ -5173,7 +5176,7 @@
           <p:cNvPr id="4" name="テキスト ボックス 3">
             <a:extLst>
               <a:ext uri="{FF2B5EF4-FFF2-40B4-BE49-F238E27FC236}">
-                <a16:creationId xmlns:a16="http://schemas.microsoft.com/office/drawing/2014/main" id="{5DE1067F-7A8F-6417-90AA-B1452F070CBD}"/>
+                <a16:creationId xmlns:a16="http://schemas.microsoft.com/office/drawing/2014/main" id="{0419665F-2BC1-CC1E-73B6-6682D7EF5764}"/>
               </a:ext>
             </a:extLst>
           </p:cNvPr>
@@ -5197,20 +5200,14 @@
           <a:lstStyle/>
           <a:p>
             <a:r>
-              <a:rPr kumimoji="1" lang="en-US" altLang="ja-JP" sz="2000">
+              <a:rPr kumimoji="1" lang="ja-JP" altLang="en-US" sz="2000">
                 <a:solidFill>
                   <a:srgbClr val="333333"/>
                 </a:solidFill>
                 <a:latin typeface="Arial" panose="020B0604020202020204" pitchFamily="34" charset="0"/>
               </a:rPr>
-              <a:t>Initial DQ Walk free-to-play / auto-battle composition guide</a:t>
-            </a:r>
-            <a:endParaRPr kumimoji="1" lang="ja-JP" altLang="en-US" sz="2000">
-              <a:solidFill>
-                <a:srgbClr val="333333"/>
-              </a:solidFill>
-              <a:latin typeface="Arial" panose="020B0604020202020204" pitchFamily="34" charset="0"/>
-            </a:endParaRPr>
+              <a:t>直近のコミットでは、プロジェクトの初期構成と開発基盤が整備されました。</a:t>
+            </a:r>
           </a:p>
         </p:txBody>
       </p:sp>
@@ -5219,7 +5216,7 @@
           <p:cNvPr id="5" name="テキスト ボックス 4">
             <a:extLst>
               <a:ext uri="{FF2B5EF4-FFF2-40B4-BE49-F238E27FC236}">
-                <a16:creationId xmlns:a16="http://schemas.microsoft.com/office/drawing/2014/main" id="{375FDC97-021B-29DB-6C33-78272C6540F2}"/>
+                <a16:creationId xmlns:a16="http://schemas.microsoft.com/office/drawing/2014/main" id="{F92B59E2-9C8E-23F1-444C-1777355A1D45}"/>
               </a:ext>
             </a:extLst>
           </p:cNvPr>
@@ -5266,7 +5263,7 @@
             <a:hlinkClick r:id="" action="ppaction://media"/>
             <a:extLst>
               <a:ext uri="{FF2B5EF4-FFF2-40B4-BE49-F238E27FC236}">
-                <a16:creationId xmlns:a16="http://schemas.microsoft.com/office/drawing/2014/main" id="{AE268EE4-E7B1-3F55-B0C9-B758DED9ADB4}"/>
+                <a16:creationId xmlns:a16="http://schemas.microsoft.com/office/drawing/2014/main" id="{46B25362-7B2A-5E68-334A-C7E432639C47}"/>
               </a:ext>
             </a:extLst>
           </p:cNvPr>
@@ -5301,7 +5298,7 @@
     </p:spTree>
     <p:extLst>
       <p:ext uri="{BB962C8B-B14F-4D97-AF65-F5344CB8AC3E}">
-        <p14:creationId xmlns:p14="http://schemas.microsoft.com/office/powerpoint/2010/main" val="1276985580"/>
+        <p14:creationId xmlns:p14="http://schemas.microsoft.com/office/powerpoint/2010/main" val="3683458738"/>
       </p:ext>
     </p:extLst>
   </p:cSld>
@@ -5310,10 +5307,10 @@
   </p:clrMapOvr>
   <mc:AlternateContent xmlns:mc="http://schemas.openxmlformats.org/markup-compatibility/2006">
     <mc:Choice xmlns:p14="http://schemas.microsoft.com/office/powerpoint/2010/main" Requires="p14">
-      <p:transition spd="slow" p14:dur="2000" advTm="9000"/>
+      <p:transition spd="slow" p14:dur="2000" advTm="7000"/>
     </mc:Choice>
     <mc:Fallback>
-      <p:transition spd="slow" advTm="9000"/>
+      <p:transition spd="slow" advTm="7000"/>
     </mc:Fallback>
   </mc:AlternateContent>
   <p:timing>
@@ -5344,7 +5341,7 @@
                                   <p:childTnLst>
                                     <p:cmd type="call" cmd="playFrom(0.0)">
                                       <p:cBhvr>
-                                        <p:cTn id="6" dur="8085" fill="hold"/>
+                                        <p:cTn id="6" dur="6126" fill="hold"/>
                                         <p:tgtEl>
                                           <p:spTgt spid="6"/>
                                         </p:tgtEl>
@@ -5425,7 +5422,7 @@
           <p:cNvPr id="2" name="テキスト ボックス 1">
             <a:extLst>
               <a:ext uri="{FF2B5EF4-FFF2-40B4-BE49-F238E27FC236}">
-                <a16:creationId xmlns:a16="http://schemas.microsoft.com/office/drawing/2014/main" id="{50C86DDE-AA92-C49B-F61A-406BBBC58559}"/>
+                <a16:creationId xmlns:a16="http://schemas.microsoft.com/office/drawing/2014/main" id="{67445B55-E765-C27E-D057-228EF97C5A74}"/>
               </a:ext>
             </a:extLst>
           </p:cNvPr>
@@ -5471,7 +5468,7 @@
           <p:cNvPr id="3" name="テキスト ボックス 2">
             <a:extLst>
               <a:ext uri="{FF2B5EF4-FFF2-40B4-BE49-F238E27FC236}">
-                <a16:creationId xmlns:a16="http://schemas.microsoft.com/office/drawing/2014/main" id="{78775E74-889D-069E-D2CD-ECD232093231}"/>
+                <a16:creationId xmlns:a16="http://schemas.microsoft.com/office/drawing/2014/main" id="{83A879BA-2F25-15BD-47E5-0C3850DA8BDA}"/>
               </a:ext>
             </a:extLst>
           </p:cNvPr>
@@ -5511,7 +5508,7 @@
           <p:cNvPr id="4" name="テキスト ボックス 3">
             <a:extLst>
               <a:ext uri="{FF2B5EF4-FFF2-40B4-BE49-F238E27FC236}">
-                <a16:creationId xmlns:a16="http://schemas.microsoft.com/office/drawing/2014/main" id="{0AEE8166-1FEF-5AC2-8E16-1B6E64E54F1F}"/>
+                <a16:creationId xmlns:a16="http://schemas.microsoft.com/office/drawing/2014/main" id="{004D720B-5724-B652-6220-8BF1E3FCA09F}"/>
               </a:ext>
             </a:extLst>
           </p:cNvPr>
@@ -5576,7 +5573,7 @@
           <p:cNvPr id="5" name="テキスト ボックス 4">
             <a:extLst>
               <a:ext uri="{FF2B5EF4-FFF2-40B4-BE49-F238E27FC236}">
-                <a16:creationId xmlns:a16="http://schemas.microsoft.com/office/drawing/2014/main" id="{2DA4C0FE-80E4-BBB8-8B52-04D1224E5270}"/>
+                <a16:creationId xmlns:a16="http://schemas.microsoft.com/office/drawing/2014/main" id="{994E21AB-313A-10C8-2CCB-7B743805D2E0}"/>
               </a:ext>
             </a:extLst>
           </p:cNvPr>
@@ -5623,7 +5620,7 @@
             <a:hlinkClick r:id="" action="ppaction://media"/>
             <a:extLst>
               <a:ext uri="{FF2B5EF4-FFF2-40B4-BE49-F238E27FC236}">
-                <a16:creationId xmlns:a16="http://schemas.microsoft.com/office/drawing/2014/main" id="{C1514FCA-F4F1-F8DF-F846-F2066EA6F974}"/>
+                <a16:creationId xmlns:a16="http://schemas.microsoft.com/office/drawing/2014/main" id="{FE8CD153-8CFB-AB46-5B4C-74ABDB73E95A}"/>
               </a:ext>
             </a:extLst>
           </p:cNvPr>
@@ -5658,7 +5655,7 @@
     </p:spTree>
     <p:extLst>
       <p:ext uri="{BB962C8B-B14F-4D97-AF65-F5344CB8AC3E}">
-        <p14:creationId xmlns:p14="http://schemas.microsoft.com/office/powerpoint/2010/main" val="837193100"/>
+        <p14:creationId xmlns:p14="http://schemas.microsoft.com/office/powerpoint/2010/main" val="3843812158"/>
       </p:ext>
     </p:extLst>
   </p:cSld>
